--- a/output/wordlabs-hop-3day.pptx
+++ b/output/wordlabs-hop-3day.pptx
@@ -5622,7 +5622,7 @@
                 <a:ea typeface="Trebuchet MS" pitchFamily="34" charset="-122"/>
                 <a:cs typeface="Trebuchet MS" pitchFamily="34" charset="-120"/>
               </a:rPr>
-              <a:t>0</a:t>
+              <a:t>1</a:t>
             </a:r>
             <a:pPr algn="ctr" indent="0" marL="0">
               <a:buNone/>
@@ -6102,7 +6102,7 @@
                 <a:ea typeface="Calibri" pitchFamily="34" charset="-122"/>
                 <a:cs typeface="Calibri" pitchFamily="34" charset="-120"/>
               </a:rPr>
-              <a:t> through the long grass near the oval.</a:t>
+              <a:t> along the garden path, leaping from leaf to leaf.</a:t>
             </a:r>
             <a:endParaRPr lang="en-US" sz="1800" dirty="0"/>
           </a:p>
@@ -7860,7 +7860,7 @@
                 <a:ea typeface="Calibri" pitchFamily="34" charset="-122"/>
                 <a:cs typeface="Calibri" pitchFamily="34" charset="-120"/>
               </a:rPr>
-              <a:t>green plant</a:t>
+              <a:t>type of plant</a:t>
             </a:r>
             <a:endParaRPr lang="en-US" sz="850" dirty="0"/>
           </a:p>
@@ -8957,7 +8957,7 @@
                 <a:ea typeface="Calibri" pitchFamily="34" charset="-122"/>
                 <a:cs typeface="Calibri" pitchFamily="34" charset="-120"/>
               </a:rPr>
-              <a:t>green plant</a:t>
+              <a:t>type of plant</a:t>
             </a:r>
             <a:endParaRPr lang="en-US" sz="850" dirty="0"/>
           </a:p>
@@ -10291,7 +10291,7 @@
                 <a:ea typeface="Calibri" pitchFamily="34" charset="-122"/>
                 <a:cs typeface="Calibri" pitchFamily="34" charset="-120"/>
               </a:rPr>
-              <a:t>green plant</a:t>
+              <a:t>type of plant</a:t>
             </a:r>
             <a:endParaRPr lang="en-US" sz="850" dirty="0"/>
           </a:p>
@@ -10991,7 +10991,7 @@
         </p:nvSpPr>
         <p:spPr>
           <a:xfrm>
-            <a:off x="2124837" y="4169664"/>
+            <a:off x="2023872" y="4169664"/>
             <a:ext cx="685800" cy="475488"/>
           </a:xfrm>
           <a:prstGeom prst="rect">
@@ -11018,7 +11018,7 @@
         </p:nvSpPr>
         <p:spPr>
           <a:xfrm>
-            <a:off x="2124837" y="4169664"/>
+            <a:off x="2023872" y="4169664"/>
             <a:ext cx="685800" cy="475488"/>
           </a:xfrm>
           <a:prstGeom prst="rect">
@@ -11043,7 +11043,7 @@
                 <a:ea typeface="Trebuchet MS" pitchFamily="34" charset="-122"/>
                 <a:cs typeface="Trebuchet MS" pitchFamily="34" charset="-120"/>
               </a:rPr>
-              <a:t>gr</a:t>
+              <a:t>g</a:t>
             </a:r>
             <a:endParaRPr lang="en-US" sz="900" dirty="0"/>
           </a:p>
@@ -11057,7 +11057,7 @@
         </p:nvSpPr>
         <p:spPr>
           <a:xfrm>
-            <a:off x="3033522" y="4169664"/>
+            <a:off x="2831592" y="4169664"/>
             <a:ext cx="685800" cy="475488"/>
           </a:xfrm>
           <a:prstGeom prst="rect">
@@ -11084,7 +11084,7 @@
         </p:nvSpPr>
         <p:spPr>
           <a:xfrm>
-            <a:off x="3033522" y="4169664"/>
+            <a:off x="2831592" y="4169664"/>
             <a:ext cx="685800" cy="475488"/>
           </a:xfrm>
           <a:prstGeom prst="rect">
@@ -11109,7 +11109,7 @@
                 <a:ea typeface="Trebuchet MS" pitchFamily="34" charset="-122"/>
                 <a:cs typeface="Trebuchet MS" pitchFamily="34" charset="-120"/>
               </a:rPr>
-              <a:t>a</a:t>
+              <a:t>r</a:t>
             </a:r>
             <a:endParaRPr lang="en-US" sz="900" dirty="0"/>
           </a:p>
@@ -11123,7 +11123,7 @@
         </p:nvSpPr>
         <p:spPr>
           <a:xfrm>
-            <a:off x="3942207" y="4169664"/>
+            <a:off x="3639312" y="4169664"/>
             <a:ext cx="685800" cy="475488"/>
           </a:xfrm>
           <a:prstGeom prst="rect">
@@ -11150,7 +11150,7 @@
         </p:nvSpPr>
         <p:spPr>
           <a:xfrm>
-            <a:off x="3942207" y="4169664"/>
+            <a:off x="3639312" y="4169664"/>
             <a:ext cx="685800" cy="475488"/>
           </a:xfrm>
           <a:prstGeom prst="rect">
@@ -11175,7 +11175,7 @@
                 <a:ea typeface="Trebuchet MS" pitchFamily="34" charset="-122"/>
                 <a:cs typeface="Trebuchet MS" pitchFamily="34" charset="-120"/>
               </a:rPr>
-              <a:t>ss</a:t>
+              <a:t>a</a:t>
             </a:r>
             <a:endParaRPr lang="en-US" sz="900" dirty="0"/>
           </a:p>
@@ -11189,7 +11189,7 @@
         </p:nvSpPr>
         <p:spPr>
           <a:xfrm>
-            <a:off x="4850892" y="4169664"/>
+            <a:off x="4447032" y="4169664"/>
             <a:ext cx="685800" cy="475488"/>
           </a:xfrm>
           <a:prstGeom prst="rect">
@@ -11216,7 +11216,7 @@
         </p:nvSpPr>
         <p:spPr>
           <a:xfrm>
-            <a:off x="4850892" y="4169664"/>
+            <a:off x="4447032" y="4169664"/>
             <a:ext cx="685800" cy="475488"/>
           </a:xfrm>
           <a:prstGeom prst="rect">
@@ -11241,7 +11241,7 @@
                 <a:ea typeface="Trebuchet MS" pitchFamily="34" charset="-122"/>
                 <a:cs typeface="Trebuchet MS" pitchFamily="34" charset="-120"/>
               </a:rPr>
-              <a:t>h</a:t>
+              <a:t>ss</a:t>
             </a:r>
             <a:endParaRPr lang="en-US" sz="900" dirty="0"/>
           </a:p>
@@ -11255,7 +11255,7 @@
         </p:nvSpPr>
         <p:spPr>
           <a:xfrm>
-            <a:off x="5759577" y="4169664"/>
+            <a:off x="5254752" y="4169664"/>
             <a:ext cx="685800" cy="475488"/>
           </a:xfrm>
           <a:prstGeom prst="rect">
@@ -11282,7 +11282,7 @@
         </p:nvSpPr>
         <p:spPr>
           <a:xfrm>
-            <a:off x="5759577" y="4169664"/>
+            <a:off x="5254752" y="4169664"/>
             <a:ext cx="685800" cy="475488"/>
           </a:xfrm>
           <a:prstGeom prst="rect">
@@ -11307,7 +11307,7 @@
                 <a:ea typeface="Trebuchet MS" pitchFamily="34" charset="-122"/>
                 <a:cs typeface="Trebuchet MS" pitchFamily="34" charset="-120"/>
               </a:rPr>
-              <a:t>o</a:t>
+              <a:t>h</a:t>
             </a:r>
             <a:endParaRPr lang="en-US" sz="900" dirty="0"/>
           </a:p>
@@ -11321,7 +11321,7 @@
         </p:nvSpPr>
         <p:spPr>
           <a:xfrm>
-            <a:off x="6668262" y="4169664"/>
+            <a:off x="6062472" y="4169664"/>
             <a:ext cx="685800" cy="475488"/>
           </a:xfrm>
           <a:prstGeom prst="rect">
@@ -11348,7 +11348,7 @@
         </p:nvSpPr>
         <p:spPr>
           <a:xfrm>
-            <a:off x="6668262" y="4169664"/>
+            <a:off x="6062472" y="4169664"/>
             <a:ext cx="685800" cy="475488"/>
           </a:xfrm>
           <a:prstGeom prst="rect">
@@ -11373,7 +11373,7 @@
                 <a:ea typeface="Trebuchet MS" pitchFamily="34" charset="-122"/>
                 <a:cs typeface="Trebuchet MS" pitchFamily="34" charset="-120"/>
               </a:rPr>
-              <a:t>pp</a:t>
+              <a:t>o</a:t>
             </a:r>
             <a:endParaRPr lang="en-US" sz="900" dirty="0"/>
           </a:p>
@@ -11387,7 +11387,7 @@
         </p:nvSpPr>
         <p:spPr>
           <a:xfrm>
-            <a:off x="7576947" y="4169664"/>
+            <a:off x="6870192" y="4169664"/>
             <a:ext cx="685800" cy="475488"/>
           </a:xfrm>
           <a:prstGeom prst="rect">
@@ -11414,7 +11414,73 @@
         </p:nvSpPr>
         <p:spPr>
           <a:xfrm>
-            <a:off x="7576947" y="4169664"/>
+            <a:off x="6870192" y="4169664"/>
+            <a:ext cx="685800" cy="475488"/>
+          </a:xfrm>
+          <a:prstGeom prst="rect">
+            <a:avLst/>
+          </a:prstGeom>
+          <a:noFill/>
+          <a:ln/>
+        </p:spPr>
+        <p:txBody>
+          <a:bodyPr wrap="square" lIns="0" tIns="0" rIns="0" bIns="0" rtlCol="0" anchor="ctr"/>
+          <a:lstStyle/>
+          <a:p>
+            <a:pPr algn="ctr" indent="0" marL="0">
+              <a:buNone/>
+            </a:pPr>
+            <a:r>
+              <a:rPr lang="en-US" sz="900" b="1" dirty="0">
+                <a:solidFill>
+                  <a:srgbClr val="9D174D"/>
+                </a:solidFill>
+                <a:latin typeface="Trebuchet MS" pitchFamily="34" charset="0"/>
+                <a:ea typeface="Trebuchet MS" pitchFamily="34" charset="-122"/>
+                <a:cs typeface="Trebuchet MS" pitchFamily="34" charset="-120"/>
+              </a:rPr>
+              <a:t>pp</a:t>
+            </a:r>
+            <a:endParaRPr lang="en-US" sz="900" dirty="0"/>
+          </a:p>
+        </p:txBody>
+      </p:sp>
+      <p:sp>
+        <p:nvSpPr>
+          <p:cNvPr id="53" name="Shape 51"/>
+          <p:cNvSpPr/>
+          <p:nvPr/>
+        </p:nvSpPr>
+        <p:spPr>
+          <a:xfrm>
+            <a:off x="7677912" y="4169664"/>
+            <a:ext cx="685800" cy="475488"/>
+          </a:xfrm>
+          <a:prstGeom prst="rect">
+            <a:avLst>
+              <a:gd name="adj" fmla="val 7692"/>
+            </a:avLst>
+          </a:prstGeom>
+          <a:solidFill>
+            <a:srgbClr val="FFFFFF"/>
+          </a:solidFill>
+          <a:ln w="12700">
+            <a:solidFill>
+              <a:srgbClr val="DB2777"/>
+            </a:solidFill>
+            <a:prstDash val="solid"/>
+          </a:ln>
+        </p:spPr>
+      </p:sp>
+      <p:sp>
+        <p:nvSpPr>
+          <p:cNvPr id="54" name="Text 52"/>
+          <p:cNvSpPr/>
+          <p:nvPr/>
+        </p:nvSpPr>
+        <p:spPr>
+          <a:xfrm>
+            <a:off x="7677912" y="4169664"/>
             <a:ext cx="685800" cy="475488"/>
           </a:xfrm>
           <a:prstGeom prst="rect">
@@ -13026,7 +13092,7 @@
                 <a:ea typeface="Calibri" pitchFamily="34" charset="-122"/>
                 <a:cs typeface="Calibri" pitchFamily="34" charset="-120"/>
               </a:rPr>
-              <a:t>final consonant doubled before vowel suffix</a:t>
+              <a:t>consonant doubled before vowel suffix</a:t>
             </a:r>
             <a:endParaRPr lang="en-US" sz="700" dirty="0"/>
           </a:p>
@@ -13138,7 +13204,7 @@
                 <a:ea typeface="Calibri" pitchFamily="34" charset="-122"/>
                 <a:cs typeface="Calibri" pitchFamily="34" charset="-120"/>
               </a:rPr>
-              <a:t>action happening now</a:t>
+              <a:t>happening now</a:t>
             </a:r>
             <a:endParaRPr lang="en-US" sz="850" dirty="0"/>
           </a:p>
@@ -14162,7 +14228,7 @@
                 <a:ea typeface="Calibri" pitchFamily="34" charset="-122"/>
                 <a:cs typeface="Calibri" pitchFamily="34" charset="-120"/>
               </a:rPr>
-              <a:t>final consonant doubled before vowel suffix</a:t>
+              <a:t>consonant doubled before vowel suffix</a:t>
             </a:r>
             <a:endParaRPr lang="en-US" sz="700" dirty="0"/>
           </a:p>
@@ -14274,7 +14340,7 @@
                 <a:ea typeface="Calibri" pitchFamily="34" charset="-122"/>
                 <a:cs typeface="Calibri" pitchFamily="34" charset="-120"/>
               </a:rPr>
-              <a:t>action happening now</a:t>
+              <a:t>happening now</a:t>
             </a:r>
             <a:endParaRPr lang="en-US" sz="850" dirty="0"/>
           </a:p>
@@ -15695,7 +15761,7 @@
                 <a:ea typeface="Calibri" pitchFamily="34" charset="-122"/>
                 <a:cs typeface="Calibri" pitchFamily="34" charset="-120"/>
               </a:rPr>
-              <a:t>final consonant doubled before vowel suffix</a:t>
+              <a:t>consonant doubled before vowel suffix</a:t>
             </a:r>
             <a:endParaRPr lang="en-US" sz="700" dirty="0"/>
           </a:p>
@@ -15807,7 +15873,7 @@
                 <a:ea typeface="Calibri" pitchFamily="34" charset="-122"/>
                 <a:cs typeface="Calibri" pitchFamily="34" charset="-120"/>
               </a:rPr>
-              <a:t>action happening now</a:t>
+              <a:t>happening now</a:t>
             </a:r>
             <a:endParaRPr lang="en-US" sz="850" dirty="0"/>
           </a:p>
@@ -16178,7 +16244,7 @@
         </p:nvSpPr>
         <p:spPr>
           <a:xfrm>
-            <a:off x="2427732" y="4169664"/>
+            <a:off x="2670048" y="4169664"/>
             <a:ext cx="685800" cy="475488"/>
           </a:xfrm>
           <a:prstGeom prst="rect">
@@ -16205,7 +16271,7 @@
         </p:nvSpPr>
         <p:spPr>
           <a:xfrm>
-            <a:off x="2427732" y="4169664"/>
+            <a:off x="2670048" y="4169664"/>
             <a:ext cx="685800" cy="475488"/>
           </a:xfrm>
           <a:prstGeom prst="rect">
@@ -16244,7 +16310,7 @@
         </p:nvSpPr>
         <p:spPr>
           <a:xfrm>
-            <a:off x="3639312" y="4169664"/>
+            <a:off x="4123944" y="4169664"/>
             <a:ext cx="685800" cy="475488"/>
           </a:xfrm>
           <a:prstGeom prst="rect">
@@ -16271,7 +16337,7 @@
         </p:nvSpPr>
         <p:spPr>
           <a:xfrm>
-            <a:off x="3639312" y="4169664"/>
+            <a:off x="4123944" y="4169664"/>
             <a:ext cx="685800" cy="475488"/>
           </a:xfrm>
           <a:prstGeom prst="rect">
@@ -16310,7 +16376,7 @@
         </p:nvSpPr>
         <p:spPr>
           <a:xfrm>
-            <a:off x="4850892" y="4169664"/>
+            <a:off x="5577840" y="4169664"/>
             <a:ext cx="685800" cy="475488"/>
           </a:xfrm>
           <a:prstGeom prst="rect">
@@ -16337,7 +16403,7 @@
         </p:nvSpPr>
         <p:spPr>
           <a:xfrm>
-            <a:off x="4850892" y="4169664"/>
+            <a:off x="5577840" y="4169664"/>
             <a:ext cx="685800" cy="475488"/>
           </a:xfrm>
           <a:prstGeom prst="rect">
@@ -16376,7 +16442,7 @@
         </p:nvSpPr>
         <p:spPr>
           <a:xfrm>
-            <a:off x="6062472" y="4169664"/>
+            <a:off x="7031736" y="4169664"/>
             <a:ext cx="685800" cy="475488"/>
           </a:xfrm>
           <a:prstGeom prst="rect">
@@ -16403,7 +16469,7 @@
         </p:nvSpPr>
         <p:spPr>
           <a:xfrm>
-            <a:off x="6062472" y="4169664"/>
+            <a:off x="7031736" y="4169664"/>
             <a:ext cx="685800" cy="475488"/>
           </a:xfrm>
           <a:prstGeom prst="rect">
@@ -16428,73 +16494,7 @@
                 <a:ea typeface="Trebuchet MS" pitchFamily="34" charset="-122"/>
                 <a:cs typeface="Trebuchet MS" pitchFamily="34" charset="-120"/>
               </a:rPr>
-              <a:t>i</a:t>
-            </a:r>
-            <a:endParaRPr lang="en-US" sz="900" dirty="0"/>
-          </a:p>
-        </p:txBody>
-      </p:sp>
-      <p:sp>
-        <p:nvSpPr>
-          <p:cNvPr id="45" name="Shape 43"/>
-          <p:cNvSpPr/>
-          <p:nvPr/>
-        </p:nvSpPr>
-        <p:spPr>
-          <a:xfrm>
-            <a:off x="7274052" y="4169664"/>
-            <a:ext cx="685800" cy="475488"/>
-          </a:xfrm>
-          <a:prstGeom prst="rect">
-            <a:avLst>
-              <a:gd name="adj" fmla="val 7692"/>
-            </a:avLst>
-          </a:prstGeom>
-          <a:solidFill>
-            <a:srgbClr val="FFFFFF"/>
-          </a:solidFill>
-          <a:ln w="12700">
-            <a:solidFill>
-              <a:srgbClr val="DB2777"/>
-            </a:solidFill>
-            <a:prstDash val="solid"/>
-          </a:ln>
-        </p:spPr>
-      </p:sp>
-      <p:sp>
-        <p:nvSpPr>
-          <p:cNvPr id="46" name="Text 44"/>
-          <p:cNvSpPr/>
-          <p:nvPr/>
-        </p:nvSpPr>
-        <p:spPr>
-          <a:xfrm>
-            <a:off x="7274052" y="4169664"/>
-            <a:ext cx="685800" cy="475488"/>
-          </a:xfrm>
-          <a:prstGeom prst="rect">
-            <a:avLst/>
-          </a:prstGeom>
-          <a:noFill/>
-          <a:ln/>
-        </p:spPr>
-        <p:txBody>
-          <a:bodyPr wrap="square" lIns="0" tIns="0" rIns="0" bIns="0" rtlCol="0" anchor="ctr"/>
-          <a:lstStyle/>
-          <a:p>
-            <a:pPr algn="ctr" indent="0" marL="0">
-              <a:buNone/>
-            </a:pPr>
-            <a:r>
-              <a:rPr lang="en-US" sz="900" b="1" dirty="0">
-                <a:solidFill>
-                  <a:srgbClr val="9D174D"/>
-                </a:solidFill>
-                <a:latin typeface="Trebuchet MS" pitchFamily="34" charset="0"/>
-                <a:ea typeface="Trebuchet MS" pitchFamily="34" charset="-122"/>
-                <a:cs typeface="Trebuchet MS" pitchFamily="34" charset="-120"/>
-              </a:rPr>
-              <a:t>ng</a:t>
+              <a:t>ing</a:t>
             </a:r>
             <a:endParaRPr lang="en-US" sz="900" dirty="0"/>
           </a:p>
@@ -17402,7 +17402,7 @@
                 <a:ea typeface="Trebuchet MS" pitchFamily="34" charset="-122"/>
                 <a:cs typeface="Trebuchet MS" pitchFamily="34" charset="-120"/>
               </a:rPr>
-              <a:t>1</a:t>
+              <a:t>2</a:t>
             </a:r>
             <a:pPr algn="ctr" indent="0" marL="0">
               <a:buNone/>
@@ -17416,7 +17416,7 @@
                 <a:ea typeface="Trebuchet MS" pitchFamily="34" charset="-122"/>
                 <a:cs typeface="Trebuchet MS" pitchFamily="34" charset="-120"/>
               </a:rPr>
-              <a:t>  punctuation mark</a:t>
+              <a:t>  punctuation marks</a:t>
             </a:r>
             <a:endParaRPr lang="en-US" sz="2800" dirty="0"/>
           </a:p>
@@ -17820,7 +17820,7 @@
                 <a:ea typeface="Calibri" pitchFamily="34" charset="-122"/>
                 <a:cs typeface="Calibri" pitchFamily="34" charset="-120"/>
               </a:rPr>
-              <a:t>The excited children were </a:t>
+              <a:t>She </a:t>
             </a:r>
             <a:pPr algn="l" indent="0" marL="0">
               <a:buNone/>
@@ -17837,7 +17837,7 @@
                 <a:ea typeface="Calibri" pitchFamily="34" charset="-122"/>
                 <a:cs typeface="Calibri" pitchFamily="34" charset="-120"/>
               </a:rPr>
-              <a:t>hopping</a:t>
+              <a:t>hopped</a:t>
             </a:r>
             <a:pPr algn="l" indent="0" marL="0">
               <a:buNone/>
@@ -17851,7 +17851,7 @@
                 <a:ea typeface="Calibri" pitchFamily="34" charset="-122"/>
                 <a:cs typeface="Calibri" pitchFamily="34" charset="-120"/>
               </a:rPr>
-              <a:t> and </a:t>
+              <a:t> over the puddle carefully, then watched the </a:t>
             </a:r>
             <a:pPr algn="l" indent="0" marL="0">
               <a:buNone/>
@@ -17868,7 +17868,7 @@
                 <a:ea typeface="Calibri" pitchFamily="34" charset="-122"/>
                 <a:cs typeface="Calibri" pitchFamily="34" charset="-120"/>
               </a:rPr>
-              <a:t>skipping</a:t>
+              <a:t>hopper</a:t>
             </a:r>
             <a:pPr algn="l" indent="0" marL="0">
               <a:buNone/>
@@ -17882,7 +17882,7 @@
                 <a:ea typeface="Calibri" pitchFamily="34" charset="-122"/>
                 <a:cs typeface="Calibri" pitchFamily="34" charset="-120"/>
               </a:rPr>
-              <a:t>, but the </a:t>
+              <a:t> machine drop seeds, and finally played </a:t>
             </a:r>
             <a:pPr algn="l" indent="0" marL="0">
               <a:buNone/>
@@ -17899,7 +17899,7 @@
                 <a:ea typeface="Calibri" pitchFamily="34" charset="-122"/>
                 <a:cs typeface="Calibri" pitchFamily="34" charset="-120"/>
               </a:rPr>
-              <a:t>hopper</a:t>
+              <a:t>hopscotch</a:t>
             </a:r>
             <a:pPr algn="l" indent="0" marL="0">
               <a:buNone/>
@@ -17913,7 +17913,7 @@
                 <a:ea typeface="Calibri" pitchFamily="34" charset="-122"/>
                 <a:cs typeface="Calibri" pitchFamily="34" charset="-120"/>
               </a:rPr>
-              <a:t> in the corner just watched quietly.</a:t>
+              <a:t> on the dry path.</a:t>
             </a:r>
             <a:endParaRPr lang="en-US" sz="1800" dirty="0"/>
           </a:p>
@@ -18068,7 +18068,7 @@
                 <a:ea typeface="Trebuchet MS" pitchFamily="34" charset="-122"/>
                 <a:cs typeface="Trebuchet MS" pitchFamily="34" charset="-120"/>
               </a:rPr>
-              <a:t>hopping</a:t>
+              <a:t>hopped</a:t>
             </a:r>
             <a:endParaRPr lang="en-US" sz="1400" dirty="0"/>
           </a:p>
@@ -18196,7 +18196,7 @@
                 <a:ea typeface="Trebuchet MS" pitchFamily="34" charset="-122"/>
                 <a:cs typeface="Trebuchet MS" pitchFamily="34" charset="-120"/>
               </a:rPr>
-              <a:t>skipping</a:t>
+              <a:t>hopper</a:t>
             </a:r>
             <a:endParaRPr lang="en-US" sz="1400" dirty="0"/>
           </a:p>
@@ -18324,7 +18324,7 @@
                 <a:ea typeface="Trebuchet MS" pitchFamily="34" charset="-122"/>
                 <a:cs typeface="Trebuchet MS" pitchFamily="34" charset="-120"/>
               </a:rPr>
-              <a:t>hopper</a:t>
+              <a:t>hopscotch</a:t>
             </a:r>
             <a:endParaRPr lang="en-US" sz="1400" dirty="0"/>
           </a:p>
@@ -18794,7 +18794,7 @@
                 <a:ea typeface="Trebuchet MS" pitchFamily="34" charset="-122"/>
                 <a:cs typeface="Trebuchet MS" pitchFamily="34" charset="-120"/>
               </a:rPr>
-              <a:t>hopping</a:t>
+              <a:t>hopped</a:t>
             </a:r>
             <a:endParaRPr lang="en-US" sz="2800" dirty="0"/>
           </a:p>
@@ -19621,7 +19621,7 @@
                 <a:ea typeface="Trebuchet MS" pitchFamily="34" charset="-122"/>
                 <a:cs typeface="Trebuchet MS" pitchFamily="34" charset="-120"/>
               </a:rPr>
-              <a:t>hopping</a:t>
+              <a:t>hopped</a:t>
             </a:r>
             <a:endParaRPr lang="en-US" sz="2800" dirty="0"/>
           </a:p>
@@ -19950,7 +19950,7 @@
                 <a:ea typeface="Calibri" pitchFamily="34" charset="-122"/>
                 <a:cs typeface="Calibri" pitchFamily="34" charset="-120"/>
               </a:rPr>
-              <a:t>final consonant doubled before vowel suffix</a:t>
+              <a:t>consonant doubled before vowel suffix</a:t>
             </a:r>
             <a:endParaRPr lang="en-US" sz="700" dirty="0"/>
           </a:p>
@@ -20023,7 +20023,7 @@
                 <a:ea typeface="Trebuchet MS" pitchFamily="34" charset="-122"/>
                 <a:cs typeface="Trebuchet MS" pitchFamily="34" charset="-120"/>
               </a:rPr>
-              <a:t>ing</a:t>
+              <a:t>ed</a:t>
             </a:r>
             <a:endParaRPr lang="en-US" sz="1300" dirty="0"/>
           </a:p>
@@ -20062,7 +20062,7 @@
                 <a:ea typeface="Calibri" pitchFamily="34" charset="-122"/>
                 <a:cs typeface="Calibri" pitchFamily="34" charset="-120"/>
               </a:rPr>
-              <a:t>action happening now</a:t>
+              <a:t>happened in the past</a:t>
             </a:r>
             <a:endParaRPr lang="en-US" sz="850" dirty="0"/>
           </a:p>
@@ -20757,7 +20757,7 @@
                 <a:ea typeface="Trebuchet MS" pitchFamily="34" charset="-122"/>
                 <a:cs typeface="Trebuchet MS" pitchFamily="34" charset="-120"/>
               </a:rPr>
-              <a:t>hopping</a:t>
+              <a:t>hopped</a:t>
             </a:r>
             <a:endParaRPr lang="en-US" sz="2800" dirty="0"/>
           </a:p>
@@ -21086,7 +21086,7 @@
                 <a:ea typeface="Calibri" pitchFamily="34" charset="-122"/>
                 <a:cs typeface="Calibri" pitchFamily="34" charset="-120"/>
               </a:rPr>
-              <a:t>final consonant doubled before vowel suffix</a:t>
+              <a:t>consonant doubled before vowel suffix</a:t>
             </a:r>
             <a:endParaRPr lang="en-US" sz="700" dirty="0"/>
           </a:p>
@@ -21159,7 +21159,7 @@
                 <a:ea typeface="Trebuchet MS" pitchFamily="34" charset="-122"/>
                 <a:cs typeface="Trebuchet MS" pitchFamily="34" charset="-120"/>
               </a:rPr>
-              <a:t>ing</a:t>
+              <a:t>ed</a:t>
             </a:r>
             <a:endParaRPr lang="en-US" sz="1300" dirty="0"/>
           </a:p>
@@ -21198,7 +21198,7 @@
                 <a:ea typeface="Calibri" pitchFamily="34" charset="-122"/>
                 <a:cs typeface="Calibri" pitchFamily="34" charset="-120"/>
               </a:rPr>
-              <a:t>action happening now</a:t>
+              <a:t>happened in the past</a:t>
             </a:r>
             <a:endParaRPr lang="en-US" sz="850" dirty="0"/>
           </a:p>
@@ -21305,7 +21305,7 @@
         </p:nvSpPr>
         <p:spPr>
           <a:xfrm>
-            <a:off x="2999232" y="3364992"/>
+            <a:off x="4370832" y="3364992"/>
             <a:ext cx="1645920" cy="475488"/>
           </a:xfrm>
           <a:prstGeom prst="rect">
@@ -21332,7 +21332,7 @@
         </p:nvSpPr>
         <p:spPr>
           <a:xfrm>
-            <a:off x="2999232" y="3364992"/>
+            <a:off x="4370832" y="3364992"/>
             <a:ext cx="1645920" cy="475488"/>
           </a:xfrm>
           <a:prstGeom prst="rect">
@@ -21357,7 +21357,7 @@
                 <a:ea typeface="Trebuchet MS" pitchFamily="34" charset="-122"/>
                 <a:cs typeface="Trebuchet MS" pitchFamily="34" charset="-120"/>
               </a:rPr>
-              <a:t>hop</a:t>
+              <a:t>hopped</a:t>
             </a:r>
             <a:endParaRPr lang="en-US" sz="1400" dirty="0"/>
           </a:p>
@@ -21365,14 +21365,41 @@
       </p:sp>
       <p:sp>
         <p:nvSpPr>
-          <p:cNvPr id="31" name="Text 29"/>
-          <p:cNvSpPr/>
-          <p:nvPr/>
-        </p:nvSpPr>
-        <p:spPr>
-          <a:xfrm>
-            <a:off x="4645152" y="3364992"/>
-            <a:ext cx="1097280" cy="475488"/>
+          <p:cNvPr id="31" name="Shape 29"/>
+          <p:cNvSpPr/>
+          <p:nvPr/>
+        </p:nvSpPr>
+        <p:spPr>
+          <a:xfrm>
+            <a:off x="365760" y="4096512"/>
+            <a:ext cx="1371600" cy="804672"/>
+          </a:xfrm>
+          <a:prstGeom prst="rect">
+            <a:avLst>
+              <a:gd name="adj" fmla="val 6818"/>
+            </a:avLst>
+          </a:prstGeom>
+          <a:solidFill>
+            <a:srgbClr val="E2E8F0"/>
+          </a:solidFill>
+          <a:ln w="12700">
+            <a:solidFill>
+              <a:srgbClr val="E2E8F0"/>
+            </a:solidFill>
+            <a:prstDash val="solid"/>
+          </a:ln>
+        </p:spPr>
+      </p:sp>
+      <p:sp>
+        <p:nvSpPr>
+          <p:cNvPr id="32" name="Text 30"/>
+          <p:cNvSpPr/>
+          <p:nvPr/>
+        </p:nvSpPr>
+        <p:spPr>
+          <a:xfrm>
+            <a:off x="365760" y="4096512"/>
+            <a:ext cx="1371600" cy="804672"/>
           </a:xfrm>
           <a:prstGeom prst="rect">
             <a:avLst/>
@@ -21388,96 +21415,30 @@
               <a:buNone/>
             </a:pPr>
             <a:r>
-              <a:rPr lang="en-US" sz="1600" b="1" dirty="0">
-                <a:solidFill>
-                  <a:srgbClr val="0D9488"/>
+              <a:rPr lang="en-US" sz="1100" b="1" dirty="0">
+                <a:solidFill>
+                  <a:srgbClr val="475569"/>
                 </a:solidFill>
                 <a:latin typeface="Trebuchet MS" pitchFamily="34" charset="0"/>
                 <a:ea typeface="Trebuchet MS" pitchFamily="34" charset="-122"/>
                 <a:cs typeface="Trebuchet MS" pitchFamily="34" charset="-120"/>
               </a:rPr>
-              <a:t>·</a:t>
-            </a:r>
-            <a:endParaRPr lang="en-US" sz="1600" dirty="0"/>
-          </a:p>
-        </p:txBody>
-      </p:sp>
-      <p:sp>
-        <p:nvSpPr>
-          <p:cNvPr id="32" name="Shape 30"/>
-          <p:cNvSpPr/>
-          <p:nvPr/>
-        </p:nvSpPr>
-        <p:spPr>
-          <a:xfrm>
-            <a:off x="5742432" y="3364992"/>
-            <a:ext cx="1645920" cy="475488"/>
-          </a:xfrm>
-          <a:prstGeom prst="rect">
-            <a:avLst>
-              <a:gd name="adj" fmla="val 9615"/>
-            </a:avLst>
-          </a:prstGeom>
-          <a:solidFill>
-            <a:srgbClr val="FFFFFF"/>
-          </a:solidFill>
-          <a:ln w="12700">
-            <a:solidFill>
-              <a:srgbClr val="0D9488"/>
-            </a:solidFill>
-            <a:prstDash val="solid"/>
-          </a:ln>
-        </p:spPr>
-      </p:sp>
-      <p:sp>
-        <p:nvSpPr>
-          <p:cNvPr id="33" name="Text 31"/>
-          <p:cNvSpPr/>
-          <p:nvPr/>
-        </p:nvSpPr>
-        <p:spPr>
-          <a:xfrm>
-            <a:off x="5742432" y="3364992"/>
-            <a:ext cx="1645920" cy="475488"/>
-          </a:xfrm>
-          <a:prstGeom prst="rect">
-            <a:avLst/>
-          </a:prstGeom>
-          <a:noFill/>
-          <a:ln/>
-        </p:spPr>
-        <p:txBody>
-          <a:bodyPr wrap="square" lIns="0" tIns="0" rIns="0" bIns="0" rtlCol="0" anchor="ctr"/>
-          <a:lstStyle/>
-          <a:p>
-            <a:pPr algn="ctr" indent="0" marL="0">
-              <a:buNone/>
-            </a:pPr>
-            <a:r>
-              <a:rPr lang="en-US" sz="1400" b="1" dirty="0">
-                <a:solidFill>
-                  <a:srgbClr val="0D9488"/>
-                </a:solidFill>
-                <a:latin typeface="Trebuchet MS" pitchFamily="34" charset="0"/>
-                <a:ea typeface="Trebuchet MS" pitchFamily="34" charset="-122"/>
-                <a:cs typeface="Trebuchet MS" pitchFamily="34" charset="-120"/>
-              </a:rPr>
-              <a:t>ping</a:t>
-            </a:r>
-            <a:endParaRPr lang="en-US" sz="1400" dirty="0"/>
-          </a:p>
-        </p:txBody>
-      </p:sp>
-      <p:sp>
-        <p:nvSpPr>
-          <p:cNvPr id="34" name="Shape 32"/>
-          <p:cNvSpPr/>
-          <p:nvPr/>
-        </p:nvSpPr>
-        <p:spPr>
-          <a:xfrm>
-            <a:off x="365760" y="4096512"/>
-            <a:ext cx="1371600" cy="804672"/>
+              <a:t>Phonemes</a:t>
+            </a:r>
+            <a:endParaRPr lang="en-US" sz="1100" dirty="0"/>
+          </a:p>
+        </p:txBody>
+      </p:sp>
+      <p:sp>
+        <p:nvSpPr>
+          <p:cNvPr id="33" name="Shape 31"/>
+          <p:cNvSpPr/>
+          <p:nvPr/>
+        </p:nvSpPr>
+        <p:spPr>
+          <a:xfrm>
+            <a:off x="1874520" y="4096512"/>
+            <a:ext cx="6903720" cy="804672"/>
           </a:xfrm>
           <a:prstGeom prst="rect">
             <a:avLst>
@@ -21485,85 +21446,19 @@
             </a:avLst>
           </a:prstGeom>
           <a:solidFill>
-            <a:srgbClr val="E2E8F0"/>
+            <a:srgbClr val="F8FAFC"/>
           </a:solidFill>
           <a:ln w="12700">
             <a:solidFill>
               <a:srgbClr val="E2E8F0"/>
             </a:solidFill>
-            <a:prstDash val="solid"/>
-          </a:ln>
-        </p:spPr>
-      </p:sp>
-      <p:sp>
-        <p:nvSpPr>
-          <p:cNvPr id="35" name="Text 33"/>
-          <p:cNvSpPr/>
-          <p:nvPr/>
-        </p:nvSpPr>
-        <p:spPr>
-          <a:xfrm>
-            <a:off x="365760" y="4096512"/>
-            <a:ext cx="1371600" cy="804672"/>
-          </a:xfrm>
-          <a:prstGeom prst="rect">
-            <a:avLst/>
-          </a:prstGeom>
-          <a:noFill/>
-          <a:ln/>
-        </p:spPr>
-        <p:txBody>
-          <a:bodyPr wrap="square" lIns="0" tIns="0" rIns="0" bIns="0" rtlCol="0" anchor="ctr"/>
-          <a:lstStyle/>
-          <a:p>
-            <a:pPr algn="ctr" indent="0" marL="0">
-              <a:buNone/>
-            </a:pPr>
-            <a:r>
-              <a:rPr lang="en-US" sz="1100" b="1" dirty="0">
-                <a:solidFill>
-                  <a:srgbClr val="475569"/>
-                </a:solidFill>
-                <a:latin typeface="Trebuchet MS" pitchFamily="34" charset="0"/>
-                <a:ea typeface="Trebuchet MS" pitchFamily="34" charset="-122"/>
-                <a:cs typeface="Trebuchet MS" pitchFamily="34" charset="-120"/>
-              </a:rPr>
-              <a:t>Phonemes</a:t>
-            </a:r>
-            <a:endParaRPr lang="en-US" sz="1100" dirty="0"/>
-          </a:p>
-        </p:txBody>
-      </p:sp>
-      <p:sp>
-        <p:nvSpPr>
-          <p:cNvPr id="36" name="Shape 34"/>
-          <p:cNvSpPr/>
-          <p:nvPr/>
-        </p:nvSpPr>
-        <p:spPr>
-          <a:xfrm>
-            <a:off x="1874520" y="4096512"/>
-            <a:ext cx="6903720" cy="804672"/>
-          </a:xfrm>
-          <a:prstGeom prst="rect">
-            <a:avLst>
-              <a:gd name="adj" fmla="val 6818"/>
-            </a:avLst>
-          </a:prstGeom>
-          <a:solidFill>
-            <a:srgbClr val="F8FAFC"/>
-          </a:solidFill>
-          <a:ln w="12700">
-            <a:solidFill>
-              <a:srgbClr val="E2E8F0"/>
-            </a:solidFill>
             <a:prstDash val="dash"/>
           </a:ln>
         </p:spPr>
       </p:sp>
       <p:sp>
         <p:nvSpPr>
-          <p:cNvPr id="37" name="Text 35"/>
+          <p:cNvPr id="34" name="Text 32"/>
           <p:cNvSpPr/>
           <p:nvPr/>
         </p:nvSpPr>
@@ -22025,7 +21920,7 @@
                 <a:ea typeface="Trebuchet MS" pitchFamily="34" charset="-122"/>
                 <a:cs typeface="Trebuchet MS" pitchFamily="34" charset="-120"/>
               </a:rPr>
-              <a:t>hopping</a:t>
+              <a:t>hopped</a:t>
             </a:r>
             <a:endParaRPr lang="en-US" sz="2800" dirty="0"/>
           </a:p>
@@ -22354,7 +22249,7 @@
                 <a:ea typeface="Calibri" pitchFamily="34" charset="-122"/>
                 <a:cs typeface="Calibri" pitchFamily="34" charset="-120"/>
               </a:rPr>
-              <a:t>final consonant doubled before vowel suffix</a:t>
+              <a:t>consonant doubled before vowel suffix</a:t>
             </a:r>
             <a:endParaRPr lang="en-US" sz="700" dirty="0"/>
           </a:p>
@@ -22427,7 +22322,7 @@
                 <a:ea typeface="Trebuchet MS" pitchFamily="34" charset="-122"/>
                 <a:cs typeface="Trebuchet MS" pitchFamily="34" charset="-120"/>
               </a:rPr>
-              <a:t>ing</a:t>
+              <a:t>ed</a:t>
             </a:r>
             <a:endParaRPr lang="en-US" sz="1300" dirty="0"/>
           </a:p>
@@ -22466,7 +22361,7 @@
                 <a:ea typeface="Calibri" pitchFamily="34" charset="-122"/>
                 <a:cs typeface="Calibri" pitchFamily="34" charset="-120"/>
               </a:rPr>
-              <a:t>action happening now</a:t>
+              <a:t>happened in the past</a:t>
             </a:r>
             <a:endParaRPr lang="en-US" sz="850" dirty="0"/>
           </a:p>
@@ -22573,7 +22468,7 @@
         </p:nvSpPr>
         <p:spPr>
           <a:xfrm>
-            <a:off x="2999232" y="3364992"/>
+            <a:off x="4370832" y="3364992"/>
             <a:ext cx="1645920" cy="475488"/>
           </a:xfrm>
           <a:prstGeom prst="rect">
@@ -22600,7 +22495,7 @@
         </p:nvSpPr>
         <p:spPr>
           <a:xfrm>
-            <a:off x="2999232" y="3364992"/>
+            <a:off x="4370832" y="3364992"/>
             <a:ext cx="1645920" cy="475488"/>
           </a:xfrm>
           <a:prstGeom prst="rect">
@@ -22625,7 +22520,7 @@
                 <a:ea typeface="Trebuchet MS" pitchFamily="34" charset="-122"/>
                 <a:cs typeface="Trebuchet MS" pitchFamily="34" charset="-120"/>
               </a:rPr>
-              <a:t>hop</a:t>
+              <a:t>hopped</a:t>
             </a:r>
             <a:endParaRPr lang="en-US" sz="1400" dirty="0"/>
           </a:p>
@@ -22633,14 +22528,41 @@
       </p:sp>
       <p:sp>
         <p:nvSpPr>
-          <p:cNvPr id="31" name="Text 29"/>
-          <p:cNvSpPr/>
-          <p:nvPr/>
-        </p:nvSpPr>
-        <p:spPr>
-          <a:xfrm>
-            <a:off x="4645152" y="3364992"/>
-            <a:ext cx="1097280" cy="475488"/>
+          <p:cNvPr id="31" name="Shape 29"/>
+          <p:cNvSpPr/>
+          <p:nvPr/>
+        </p:nvSpPr>
+        <p:spPr>
+          <a:xfrm>
+            <a:off x="365760" y="4096512"/>
+            <a:ext cx="1371600" cy="804672"/>
+          </a:xfrm>
+          <a:prstGeom prst="rect">
+            <a:avLst>
+              <a:gd name="adj" fmla="val 6818"/>
+            </a:avLst>
+          </a:prstGeom>
+          <a:solidFill>
+            <a:srgbClr val="E2E8F0"/>
+          </a:solidFill>
+          <a:ln w="12700">
+            <a:solidFill>
+              <a:srgbClr val="E2E8F0"/>
+            </a:solidFill>
+            <a:prstDash val="solid"/>
+          </a:ln>
+        </p:spPr>
+      </p:sp>
+      <p:sp>
+        <p:nvSpPr>
+          <p:cNvPr id="32" name="Text 30"/>
+          <p:cNvSpPr/>
+          <p:nvPr/>
+        </p:nvSpPr>
+        <p:spPr>
+          <a:xfrm>
+            <a:off x="365760" y="4096512"/>
+            <a:ext cx="1371600" cy="804672"/>
           </a:xfrm>
           <a:prstGeom prst="rect">
             <a:avLst/>
@@ -22656,57 +22578,84 @@
               <a:buNone/>
             </a:pPr>
             <a:r>
-              <a:rPr lang="en-US" sz="1600" b="1" dirty="0">
-                <a:solidFill>
-                  <a:srgbClr val="0D9488"/>
+              <a:rPr lang="en-US" sz="1100" b="1" dirty="0">
+                <a:solidFill>
+                  <a:srgbClr val="475569"/>
                 </a:solidFill>
                 <a:latin typeface="Trebuchet MS" pitchFamily="34" charset="0"/>
                 <a:ea typeface="Trebuchet MS" pitchFamily="34" charset="-122"/>
                 <a:cs typeface="Trebuchet MS" pitchFamily="34" charset="-120"/>
               </a:rPr>
-              <a:t>·</a:t>
-            </a:r>
-            <a:endParaRPr lang="en-US" sz="1600" dirty="0"/>
-          </a:p>
-        </p:txBody>
-      </p:sp>
-      <p:sp>
-        <p:nvSpPr>
-          <p:cNvPr id="32" name="Shape 30"/>
-          <p:cNvSpPr/>
-          <p:nvPr/>
-        </p:nvSpPr>
-        <p:spPr>
-          <a:xfrm>
-            <a:off x="5742432" y="3364992"/>
-            <a:ext cx="1645920" cy="475488"/>
+              <a:t>Phonemes</a:t>
+            </a:r>
+            <a:endParaRPr lang="en-US" sz="1100" dirty="0"/>
+          </a:p>
+        </p:txBody>
+      </p:sp>
+      <p:sp>
+        <p:nvSpPr>
+          <p:cNvPr id="33" name="Shape 31"/>
+          <p:cNvSpPr/>
+          <p:nvPr/>
+        </p:nvSpPr>
+        <p:spPr>
+          <a:xfrm>
+            <a:off x="1874520" y="4096512"/>
+            <a:ext cx="6903720" cy="804672"/>
           </a:xfrm>
           <a:prstGeom prst="rect">
             <a:avLst>
-              <a:gd name="adj" fmla="val 9615"/>
+              <a:gd name="adj" fmla="val 6818"/>
             </a:avLst>
           </a:prstGeom>
           <a:solidFill>
+            <a:srgbClr val="FCE7F3"/>
+          </a:solidFill>
+          <a:ln w="12700">
+            <a:solidFill>
+              <a:srgbClr val="DB2777"/>
+            </a:solidFill>
+            <a:prstDash val="solid"/>
+          </a:ln>
+        </p:spPr>
+      </p:sp>
+      <p:sp>
+        <p:nvSpPr>
+          <p:cNvPr id="34" name="Shape 32"/>
+          <p:cNvSpPr/>
+          <p:nvPr/>
+        </p:nvSpPr>
+        <p:spPr>
+          <a:xfrm>
+            <a:off x="2670048" y="4169664"/>
+            <a:ext cx="685800" cy="384048"/>
+          </a:xfrm>
+          <a:prstGeom prst="rect">
+            <a:avLst>
+              <a:gd name="adj" fmla="val 9524"/>
+            </a:avLst>
+          </a:prstGeom>
+          <a:solidFill>
             <a:srgbClr val="FFFFFF"/>
           </a:solidFill>
           <a:ln w="12700">
             <a:solidFill>
-              <a:srgbClr val="0D9488"/>
-            </a:solidFill>
-            <a:prstDash val="solid"/>
-          </a:ln>
-        </p:spPr>
-      </p:sp>
-      <p:sp>
-        <p:nvSpPr>
-          <p:cNvPr id="33" name="Text 31"/>
-          <p:cNvSpPr/>
-          <p:nvPr/>
-        </p:nvSpPr>
-        <p:spPr>
-          <a:xfrm>
-            <a:off x="5742432" y="3364992"/>
-            <a:ext cx="1645920" cy="475488"/>
+              <a:srgbClr val="DB2777"/>
+            </a:solidFill>
+            <a:prstDash val="solid"/>
+          </a:ln>
+        </p:spPr>
+      </p:sp>
+      <p:sp>
+        <p:nvSpPr>
+          <p:cNvPr id="35" name="Text 33"/>
+          <p:cNvSpPr/>
+          <p:nvPr/>
+        </p:nvSpPr>
+        <p:spPr>
+          <a:xfrm>
+            <a:off x="2670048" y="4169664"/>
+            <a:ext cx="685800" cy="384048"/>
           </a:xfrm>
           <a:prstGeom prst="rect">
             <a:avLst/>
@@ -22722,57 +22671,57 @@
               <a:buNone/>
             </a:pPr>
             <a:r>
-              <a:rPr lang="en-US" sz="1400" b="1" dirty="0">
-                <a:solidFill>
-                  <a:srgbClr val="0D9488"/>
+              <a:rPr lang="en-US" sz="900" b="1" dirty="0">
+                <a:solidFill>
+                  <a:srgbClr val="9D174D"/>
                 </a:solidFill>
                 <a:latin typeface="Trebuchet MS" pitchFamily="34" charset="0"/>
                 <a:ea typeface="Trebuchet MS" pitchFamily="34" charset="-122"/>
                 <a:cs typeface="Trebuchet MS" pitchFamily="34" charset="-120"/>
               </a:rPr>
-              <a:t>ping</a:t>
-            </a:r>
-            <a:endParaRPr lang="en-US" sz="1400" dirty="0"/>
-          </a:p>
-        </p:txBody>
-      </p:sp>
-      <p:sp>
-        <p:nvSpPr>
-          <p:cNvPr id="34" name="Shape 32"/>
-          <p:cNvSpPr/>
-          <p:nvPr/>
-        </p:nvSpPr>
-        <p:spPr>
-          <a:xfrm>
-            <a:off x="365760" y="4096512"/>
-            <a:ext cx="1371600" cy="804672"/>
+              <a:t>h</a:t>
+            </a:r>
+            <a:endParaRPr lang="en-US" sz="900" dirty="0"/>
+          </a:p>
+        </p:txBody>
+      </p:sp>
+      <p:sp>
+        <p:nvSpPr>
+          <p:cNvPr id="36" name="Shape 34"/>
+          <p:cNvSpPr/>
+          <p:nvPr/>
+        </p:nvSpPr>
+        <p:spPr>
+          <a:xfrm>
+            <a:off x="4123944" y="4169664"/>
+            <a:ext cx="685800" cy="384048"/>
           </a:xfrm>
           <a:prstGeom prst="rect">
             <a:avLst>
-              <a:gd name="adj" fmla="val 6818"/>
+              <a:gd name="adj" fmla="val 9524"/>
             </a:avLst>
           </a:prstGeom>
           <a:solidFill>
-            <a:srgbClr val="E2E8F0"/>
-          </a:solidFill>
-          <a:ln w="12700">
-            <a:solidFill>
-              <a:srgbClr val="E2E8F0"/>
-            </a:solidFill>
-            <a:prstDash val="solid"/>
-          </a:ln>
-        </p:spPr>
-      </p:sp>
-      <p:sp>
-        <p:nvSpPr>
-          <p:cNvPr id="35" name="Text 33"/>
-          <p:cNvSpPr/>
-          <p:nvPr/>
-        </p:nvSpPr>
-        <p:spPr>
-          <a:xfrm>
-            <a:off x="365760" y="4096512"/>
-            <a:ext cx="1371600" cy="804672"/>
+            <a:srgbClr val="FFFFFF"/>
+          </a:solidFill>
+          <a:ln w="12700">
+            <a:solidFill>
+              <a:srgbClr val="DB2777"/>
+            </a:solidFill>
+            <a:prstDash val="solid"/>
+          </a:ln>
+        </p:spPr>
+      </p:sp>
+      <p:sp>
+        <p:nvSpPr>
+          <p:cNvPr id="37" name="Text 35"/>
+          <p:cNvSpPr/>
+          <p:nvPr/>
+        </p:nvSpPr>
+        <p:spPr>
+          <a:xfrm>
+            <a:off x="4123944" y="4169664"/>
+            <a:ext cx="685800" cy="384048"/>
           </a:xfrm>
           <a:prstGeom prst="rect">
             <a:avLst/>
@@ -22788,38 +22737,38 @@
               <a:buNone/>
             </a:pPr>
             <a:r>
-              <a:rPr lang="en-US" sz="1100" b="1" dirty="0">
-                <a:solidFill>
-                  <a:srgbClr val="475569"/>
+              <a:rPr lang="en-US" sz="900" b="1" dirty="0">
+                <a:solidFill>
+                  <a:srgbClr val="9D174D"/>
                 </a:solidFill>
                 <a:latin typeface="Trebuchet MS" pitchFamily="34" charset="0"/>
                 <a:ea typeface="Trebuchet MS" pitchFamily="34" charset="-122"/>
                 <a:cs typeface="Trebuchet MS" pitchFamily="34" charset="-120"/>
               </a:rPr>
-              <a:t>Phonemes</a:t>
-            </a:r>
-            <a:endParaRPr lang="en-US" sz="1100" dirty="0"/>
-          </a:p>
-        </p:txBody>
-      </p:sp>
-      <p:sp>
-        <p:nvSpPr>
-          <p:cNvPr id="36" name="Shape 34"/>
-          <p:cNvSpPr/>
-          <p:nvPr/>
-        </p:nvSpPr>
-        <p:spPr>
-          <a:xfrm>
-            <a:off x="1874520" y="4096512"/>
-            <a:ext cx="6903720" cy="658368"/>
+              <a:t>o</a:t>
+            </a:r>
+            <a:endParaRPr lang="en-US" sz="900" dirty="0"/>
+          </a:p>
+        </p:txBody>
+      </p:sp>
+      <p:sp>
+        <p:nvSpPr>
+          <p:cNvPr id="38" name="Shape 36"/>
+          <p:cNvSpPr/>
+          <p:nvPr/>
+        </p:nvSpPr>
+        <p:spPr>
+          <a:xfrm>
+            <a:off x="5577840" y="4169664"/>
+            <a:ext cx="685800" cy="384048"/>
           </a:xfrm>
           <a:prstGeom prst="rect">
             <a:avLst>
-              <a:gd name="adj" fmla="val 8333"/>
+              <a:gd name="adj" fmla="val 9524"/>
             </a:avLst>
           </a:prstGeom>
           <a:solidFill>
-            <a:srgbClr val="FCE7F3"/>
+            <a:srgbClr val="FFFFFF"/>
           </a:solidFill>
           <a:ln w="12700">
             <a:solidFill>
@@ -22831,41 +22780,14 @@
       </p:sp>
       <p:sp>
         <p:nvSpPr>
-          <p:cNvPr id="37" name="Shape 35"/>
-          <p:cNvSpPr/>
-          <p:nvPr/>
-        </p:nvSpPr>
-        <p:spPr>
-          <a:xfrm>
-            <a:off x="2427732" y="4169664"/>
-            <a:ext cx="685800" cy="475488"/>
-          </a:xfrm>
-          <a:prstGeom prst="rect">
-            <a:avLst>
-              <a:gd name="adj" fmla="val 7692"/>
-            </a:avLst>
-          </a:prstGeom>
-          <a:solidFill>
-            <a:srgbClr val="FFFFFF"/>
-          </a:solidFill>
-          <a:ln w="12700">
-            <a:solidFill>
-              <a:srgbClr val="DB2777"/>
-            </a:solidFill>
-            <a:prstDash val="solid"/>
-          </a:ln>
-        </p:spPr>
-      </p:sp>
-      <p:sp>
-        <p:nvSpPr>
-          <p:cNvPr id="38" name="Text 36"/>
-          <p:cNvSpPr/>
-          <p:nvPr/>
-        </p:nvSpPr>
-        <p:spPr>
-          <a:xfrm>
-            <a:off x="2427732" y="4169664"/>
-            <a:ext cx="685800" cy="475488"/>
+          <p:cNvPr id="39" name="Text 37"/>
+          <p:cNvSpPr/>
+          <p:nvPr/>
+        </p:nvSpPr>
+        <p:spPr>
+          <a:xfrm>
+            <a:off x="5577840" y="4169664"/>
+            <a:ext cx="685800" cy="384048"/>
           </a:xfrm>
           <a:prstGeom prst="rect">
             <a:avLst/>
@@ -22889,7 +22811,7 @@
                 <a:ea typeface="Trebuchet MS" pitchFamily="34" charset="-122"/>
                 <a:cs typeface="Trebuchet MS" pitchFamily="34" charset="-120"/>
               </a:rPr>
-              <a:t>h</a:t>
+              <a:t>pp</a:t>
             </a:r>
             <a:endParaRPr lang="en-US" sz="900" dirty="0"/>
           </a:p>
@@ -22897,18 +22819,18 @@
       </p:sp>
       <p:sp>
         <p:nvSpPr>
-          <p:cNvPr id="39" name="Shape 37"/>
-          <p:cNvSpPr/>
-          <p:nvPr/>
-        </p:nvSpPr>
-        <p:spPr>
-          <a:xfrm>
-            <a:off x="3639312" y="4169664"/>
-            <a:ext cx="685800" cy="475488"/>
+          <p:cNvPr id="40" name="Shape 38"/>
+          <p:cNvSpPr/>
+          <p:nvPr/>
+        </p:nvSpPr>
+        <p:spPr>
+          <a:xfrm>
+            <a:off x="7031736" y="4169664"/>
+            <a:ext cx="685800" cy="384048"/>
           </a:xfrm>
           <a:prstGeom prst="rect">
             <a:avLst>
-              <a:gd name="adj" fmla="val 7692"/>
+              <a:gd name="adj" fmla="val 9524"/>
             </a:avLst>
           </a:prstGeom>
           <a:solidFill>
@@ -22924,14 +22846,14 @@
       </p:sp>
       <p:sp>
         <p:nvSpPr>
-          <p:cNvPr id="40" name="Text 38"/>
-          <p:cNvSpPr/>
-          <p:nvPr/>
-        </p:nvSpPr>
-        <p:spPr>
-          <a:xfrm>
-            <a:off x="3639312" y="4169664"/>
-            <a:ext cx="685800" cy="475488"/>
+          <p:cNvPr id="41" name="Text 39"/>
+          <p:cNvSpPr/>
+          <p:nvPr/>
+        </p:nvSpPr>
+        <p:spPr>
+          <a:xfrm>
+            <a:off x="7031736" y="4169664"/>
+            <a:ext cx="685800" cy="384048"/>
           </a:xfrm>
           <a:prstGeom prst="rect">
             <a:avLst/>
@@ -22955,7 +22877,7 @@
                 <a:ea typeface="Trebuchet MS" pitchFamily="34" charset="-122"/>
                 <a:cs typeface="Trebuchet MS" pitchFamily="34" charset="-120"/>
               </a:rPr>
-              <a:t>o</a:t>
+              <a:t>ed</a:t>
             </a:r>
             <a:endParaRPr lang="en-US" sz="900" dirty="0"/>
           </a:p>
@@ -22963,199 +22885,40 @@
       </p:sp>
       <p:sp>
         <p:nvSpPr>
-          <p:cNvPr id="41" name="Shape 39"/>
-          <p:cNvSpPr/>
-          <p:nvPr/>
-        </p:nvSpPr>
-        <p:spPr>
-          <a:xfrm>
-            <a:off x="4850892" y="4169664"/>
-            <a:ext cx="685800" cy="475488"/>
-          </a:xfrm>
-          <a:prstGeom prst="rect">
-            <a:avLst>
-              <a:gd name="adj" fmla="val 7692"/>
-            </a:avLst>
-          </a:prstGeom>
-          <a:solidFill>
-            <a:srgbClr val="FFFFFF"/>
-          </a:solidFill>
-          <a:ln w="12700">
-            <a:solidFill>
-              <a:srgbClr val="DB2777"/>
-            </a:solidFill>
-            <a:prstDash val="solid"/>
-          </a:ln>
-        </p:spPr>
-      </p:sp>
-      <p:sp>
-        <p:nvSpPr>
           <p:cNvPr id="42" name="Text 40"/>
           <p:cNvSpPr/>
           <p:nvPr/>
         </p:nvSpPr>
         <p:spPr>
           <a:xfrm>
-            <a:off x="4850892" y="4169664"/>
-            <a:ext cx="685800" cy="475488"/>
-          </a:xfrm>
-          <a:prstGeom prst="rect">
-            <a:avLst/>
-          </a:prstGeom>
-          <a:noFill/>
-          <a:ln/>
-        </p:spPr>
-        <p:txBody>
-          <a:bodyPr wrap="square" lIns="0" tIns="0" rIns="0" bIns="0" rtlCol="0" anchor="ctr"/>
-          <a:lstStyle/>
-          <a:p>
-            <a:pPr algn="ctr" indent="0" marL="0">
-              <a:buNone/>
-            </a:pPr>
-            <a:r>
-              <a:rPr lang="en-US" sz="900" b="1" dirty="0">
-                <a:solidFill>
-                  <a:srgbClr val="9D174D"/>
-                </a:solidFill>
-                <a:latin typeface="Trebuchet MS" pitchFamily="34" charset="0"/>
-                <a:ea typeface="Trebuchet MS" pitchFamily="34" charset="-122"/>
-                <a:cs typeface="Trebuchet MS" pitchFamily="34" charset="-120"/>
-              </a:rPr>
-              <a:t>pp</a:t>
-            </a:r>
-            <a:endParaRPr lang="en-US" sz="900" dirty="0"/>
-          </a:p>
-        </p:txBody>
-      </p:sp>
-      <p:sp>
-        <p:nvSpPr>
-          <p:cNvPr id="43" name="Shape 41"/>
-          <p:cNvSpPr/>
-          <p:nvPr/>
-        </p:nvSpPr>
-        <p:spPr>
-          <a:xfrm>
-            <a:off x="6062472" y="4169664"/>
-            <a:ext cx="685800" cy="475488"/>
-          </a:xfrm>
-          <a:prstGeom prst="rect">
-            <a:avLst>
-              <a:gd name="adj" fmla="val 7692"/>
-            </a:avLst>
-          </a:prstGeom>
-          <a:solidFill>
-            <a:srgbClr val="FFFFFF"/>
-          </a:solidFill>
-          <a:ln w="12700">
-            <a:solidFill>
-              <a:srgbClr val="DB2777"/>
-            </a:solidFill>
-            <a:prstDash val="solid"/>
-          </a:ln>
-        </p:spPr>
-      </p:sp>
-      <p:sp>
-        <p:nvSpPr>
-          <p:cNvPr id="44" name="Text 42"/>
-          <p:cNvSpPr/>
-          <p:nvPr/>
-        </p:nvSpPr>
-        <p:spPr>
-          <a:xfrm>
-            <a:off x="6062472" y="4169664"/>
-            <a:ext cx="685800" cy="475488"/>
-          </a:xfrm>
-          <a:prstGeom prst="rect">
-            <a:avLst/>
-          </a:prstGeom>
-          <a:noFill/>
-          <a:ln/>
-        </p:spPr>
-        <p:txBody>
-          <a:bodyPr wrap="square" lIns="0" tIns="0" rIns="0" bIns="0" rtlCol="0" anchor="ctr"/>
-          <a:lstStyle/>
-          <a:p>
-            <a:pPr algn="ctr" indent="0" marL="0">
-              <a:buNone/>
-            </a:pPr>
-            <a:r>
-              <a:rPr lang="en-US" sz="900" b="1" dirty="0">
-                <a:solidFill>
-                  <a:srgbClr val="9D174D"/>
-                </a:solidFill>
-                <a:latin typeface="Trebuchet MS" pitchFamily="34" charset="0"/>
-                <a:ea typeface="Trebuchet MS" pitchFamily="34" charset="-122"/>
-                <a:cs typeface="Trebuchet MS" pitchFamily="34" charset="-120"/>
-              </a:rPr>
-              <a:t>i</a:t>
-            </a:r>
-            <a:endParaRPr lang="en-US" sz="900" dirty="0"/>
-          </a:p>
-        </p:txBody>
-      </p:sp>
-      <p:sp>
-        <p:nvSpPr>
-          <p:cNvPr id="45" name="Shape 43"/>
-          <p:cNvSpPr/>
-          <p:nvPr/>
-        </p:nvSpPr>
-        <p:spPr>
-          <a:xfrm>
-            <a:off x="7274052" y="4169664"/>
-            <a:ext cx="685800" cy="475488"/>
-          </a:xfrm>
-          <a:prstGeom prst="rect">
-            <a:avLst>
-              <a:gd name="adj" fmla="val 7692"/>
-            </a:avLst>
-          </a:prstGeom>
-          <a:solidFill>
-            <a:srgbClr val="FFFFFF"/>
-          </a:solidFill>
-          <a:ln w="12700">
-            <a:solidFill>
-              <a:srgbClr val="DB2777"/>
-            </a:solidFill>
-            <a:prstDash val="solid"/>
-          </a:ln>
-        </p:spPr>
-      </p:sp>
-      <p:sp>
-        <p:nvSpPr>
-          <p:cNvPr id="46" name="Text 44"/>
-          <p:cNvSpPr/>
-          <p:nvPr/>
-        </p:nvSpPr>
-        <p:spPr>
-          <a:xfrm>
-            <a:off x="7274052" y="4169664"/>
-            <a:ext cx="685800" cy="475488"/>
-          </a:xfrm>
-          <a:prstGeom prst="rect">
-            <a:avLst/>
-          </a:prstGeom>
-          <a:noFill/>
-          <a:ln/>
-        </p:spPr>
-        <p:txBody>
-          <a:bodyPr wrap="square" lIns="0" tIns="0" rIns="0" bIns="0" rtlCol="0" anchor="ctr"/>
-          <a:lstStyle/>
-          <a:p>
-            <a:pPr algn="ctr" indent="0" marL="0">
-              <a:buNone/>
-            </a:pPr>
-            <a:r>
-              <a:rPr lang="en-US" sz="900" b="1" dirty="0">
-                <a:solidFill>
-                  <a:srgbClr val="9D174D"/>
-                </a:solidFill>
-                <a:latin typeface="Trebuchet MS" pitchFamily="34" charset="0"/>
-                <a:ea typeface="Trebuchet MS" pitchFamily="34" charset="-122"/>
-                <a:cs typeface="Trebuchet MS" pitchFamily="34" charset="-120"/>
-              </a:rPr>
-              <a:t>ng</a:t>
-            </a:r>
-            <a:endParaRPr lang="en-US" sz="900" dirty="0"/>
+            <a:off x="7031736" y="4572000"/>
+            <a:ext cx="685800" cy="219456"/>
+          </a:xfrm>
+          <a:prstGeom prst="rect">
+            <a:avLst/>
+          </a:prstGeom>
+          <a:noFill/>
+          <a:ln/>
+        </p:spPr>
+        <p:txBody>
+          <a:bodyPr wrap="square" lIns="0" tIns="0" rIns="0" bIns="0" rtlCol="0" anchor="t"/>
+          <a:lstStyle/>
+          <a:p>
+            <a:pPr algn="ctr" indent="0" marL="0">
+              <a:buNone/>
+            </a:pPr>
+            <a:r>
+              <a:rPr lang="en-US" sz="750" i="1" dirty="0">
+                <a:solidFill>
+                  <a:srgbClr val="94A3B8"/>
+                </a:solidFill>
+                <a:latin typeface="Calibri" pitchFamily="34" charset="0"/>
+                <a:ea typeface="Calibri" pitchFamily="34" charset="-122"/>
+                <a:cs typeface="Calibri" pitchFamily="34" charset="-120"/>
+              </a:rPr>
+              <a:t>/t/</a:t>
+            </a:r>
+            <a:endParaRPr lang="en-US" sz="750" dirty="0"/>
           </a:p>
         </p:txBody>
       </p:sp>
@@ -23584,7 +23347,7 @@
                 <a:ea typeface="Trebuchet MS" pitchFamily="34" charset="-122"/>
                 <a:cs typeface="Trebuchet MS" pitchFamily="34" charset="-120"/>
               </a:rPr>
-              <a:t>skipping</a:t>
+              <a:t>hopper</a:t>
             </a:r>
             <a:endParaRPr lang="en-US" sz="2800" dirty="0"/>
           </a:p>
@@ -24411,7 +24174,7 @@
                 <a:ea typeface="Trebuchet MS" pitchFamily="34" charset="-122"/>
                 <a:cs typeface="Trebuchet MS" pitchFamily="34" charset="-120"/>
               </a:rPr>
-              <a:t>skipping</a:t>
+              <a:t>hopper</a:t>
             </a:r>
             <a:endParaRPr lang="en-US" sz="2800" dirty="0"/>
           </a:p>
@@ -24500,11 +24263,11 @@
             </a:avLst>
           </a:prstGeom>
           <a:solidFill>
-            <a:srgbClr val="DDD6FE"/>
+            <a:srgbClr val="CCFBF1"/>
           </a:solidFill>
           <a:ln w="19050">
             <a:solidFill>
-              <a:srgbClr val="7C3AED"/>
+              <a:srgbClr val="0D9488"/>
             </a:solidFill>
             <a:prstDash val="solid"/>
           </a:ln>
@@ -24544,13 +24307,13 @@
             <a:r>
               <a:rPr lang="en-US" sz="1300" b="1" dirty="0">
                 <a:solidFill>
-                  <a:srgbClr val="4C1D95"/>
+                  <a:srgbClr val="0F766E"/>
                 </a:solidFill>
                 <a:latin typeface="Trebuchet MS" pitchFamily="34" charset="0"/>
                 <a:ea typeface="Trebuchet MS" pitchFamily="34" charset="-122"/>
                 <a:cs typeface="Trebuchet MS" pitchFamily="34" charset="-120"/>
               </a:rPr>
-              <a:t>skip</a:t>
+              <a:t>hop</a:t>
             </a:r>
             <a:endParaRPr lang="en-US" sz="1300" dirty="0"/>
           </a:p>
@@ -24589,7 +24352,7 @@
                 <a:ea typeface="Calibri" pitchFamily="34" charset="-122"/>
                 <a:cs typeface="Calibri" pitchFamily="34" charset="-120"/>
               </a:rPr>
-              <a:t>to leap lightly</a:t>
+              <a:t>to jump</a:t>
             </a:r>
             <a:endParaRPr lang="en-US" sz="850" dirty="0"/>
           </a:p>
@@ -24740,7 +24503,7 @@
                 <a:ea typeface="Calibri" pitchFamily="34" charset="-122"/>
                 <a:cs typeface="Calibri" pitchFamily="34" charset="-120"/>
               </a:rPr>
-              <a:t>final consonant doubled before vowel suffix</a:t>
+              <a:t>consonant doubled before vowel suffix</a:t>
             </a:r>
             <a:endParaRPr lang="en-US" sz="700" dirty="0"/>
           </a:p>
@@ -24813,7 +24576,7 @@
                 <a:ea typeface="Trebuchet MS" pitchFamily="34" charset="-122"/>
                 <a:cs typeface="Trebuchet MS" pitchFamily="34" charset="-120"/>
               </a:rPr>
-              <a:t>ing</a:t>
+              <a:t>er</a:t>
             </a:r>
             <a:endParaRPr lang="en-US" sz="1300" dirty="0"/>
           </a:p>
@@ -24852,7 +24615,7 @@
                 <a:ea typeface="Calibri" pitchFamily="34" charset="-122"/>
                 <a:cs typeface="Calibri" pitchFamily="34" charset="-120"/>
               </a:rPr>
-              <a:t>action happening now</a:t>
+              <a:t>one who does something</a:t>
             </a:r>
             <a:endParaRPr lang="en-US" sz="850" dirty="0"/>
           </a:p>
@@ -26266,7 +26029,7 @@
                 <a:ea typeface="Trebuchet MS" pitchFamily="34" charset="-122"/>
                 <a:cs typeface="Trebuchet MS" pitchFamily="34" charset="-120"/>
               </a:rPr>
-              <a:t>skipping</a:t>
+              <a:t>hopper</a:t>
             </a:r>
             <a:endParaRPr lang="en-US" sz="2800" dirty="0"/>
           </a:p>
@@ -26355,11 +26118,11 @@
             </a:avLst>
           </a:prstGeom>
           <a:solidFill>
-            <a:srgbClr val="DDD6FE"/>
+            <a:srgbClr val="CCFBF1"/>
           </a:solidFill>
           <a:ln w="19050">
             <a:solidFill>
-              <a:srgbClr val="7C3AED"/>
+              <a:srgbClr val="0D9488"/>
             </a:solidFill>
             <a:prstDash val="solid"/>
           </a:ln>
@@ -26399,13 +26162,13 @@
             <a:r>
               <a:rPr lang="en-US" sz="1300" b="1" dirty="0">
                 <a:solidFill>
-                  <a:srgbClr val="4C1D95"/>
+                  <a:srgbClr val="0F766E"/>
                 </a:solidFill>
                 <a:latin typeface="Trebuchet MS" pitchFamily="34" charset="0"/>
                 <a:ea typeface="Trebuchet MS" pitchFamily="34" charset="-122"/>
                 <a:cs typeface="Trebuchet MS" pitchFamily="34" charset="-120"/>
               </a:rPr>
-              <a:t>skip</a:t>
+              <a:t>hop</a:t>
             </a:r>
             <a:endParaRPr lang="en-US" sz="1300" dirty="0"/>
           </a:p>
@@ -26444,7 +26207,7 @@
                 <a:ea typeface="Calibri" pitchFamily="34" charset="-122"/>
                 <a:cs typeface="Calibri" pitchFamily="34" charset="-120"/>
               </a:rPr>
-              <a:t>to leap lightly</a:t>
+              <a:t>to jump</a:t>
             </a:r>
             <a:endParaRPr lang="en-US" sz="850" dirty="0"/>
           </a:p>
@@ -26595,7 +26358,7 @@
                 <a:ea typeface="Calibri" pitchFamily="34" charset="-122"/>
                 <a:cs typeface="Calibri" pitchFamily="34" charset="-120"/>
               </a:rPr>
-              <a:t>final consonant doubled before vowel suffix</a:t>
+              <a:t>consonant doubled before vowel suffix</a:t>
             </a:r>
             <a:endParaRPr lang="en-US" sz="700" dirty="0"/>
           </a:p>
@@ -26668,7 +26431,7 @@
                 <a:ea typeface="Trebuchet MS" pitchFamily="34" charset="-122"/>
                 <a:cs typeface="Trebuchet MS" pitchFamily="34" charset="-120"/>
               </a:rPr>
-              <a:t>ing</a:t>
+              <a:t>er</a:t>
             </a:r>
             <a:endParaRPr lang="en-US" sz="1300" dirty="0"/>
           </a:p>
@@ -26707,7 +26470,7 @@
                 <a:ea typeface="Calibri" pitchFamily="34" charset="-122"/>
                 <a:cs typeface="Calibri" pitchFamily="34" charset="-120"/>
               </a:rPr>
-              <a:t>action happening now</a:t>
+              <a:t>one who does something</a:t>
             </a:r>
             <a:endParaRPr lang="en-US" sz="850" dirty="0"/>
           </a:p>
@@ -26866,7 +26629,7 @@
                 <a:ea typeface="Trebuchet MS" pitchFamily="34" charset="-122"/>
                 <a:cs typeface="Trebuchet MS" pitchFamily="34" charset="-120"/>
               </a:rPr>
-              <a:t>skip</a:t>
+              <a:t>hop</a:t>
             </a:r>
             <a:endParaRPr lang="en-US" sz="1400" dirty="0"/>
           </a:p>
@@ -26971,7 +26734,7 @@
                 <a:ea typeface="Trebuchet MS" pitchFamily="34" charset="-122"/>
                 <a:cs typeface="Trebuchet MS" pitchFamily="34" charset="-120"/>
               </a:rPr>
-              <a:t>ping</a:t>
+              <a:t>per</a:t>
             </a:r>
             <a:endParaRPr lang="en-US" sz="1400" dirty="0"/>
           </a:p>
@@ -27534,7 +27297,7 @@
                 <a:ea typeface="Trebuchet MS" pitchFamily="34" charset="-122"/>
                 <a:cs typeface="Trebuchet MS" pitchFamily="34" charset="-120"/>
               </a:rPr>
-              <a:t>skipping</a:t>
+              <a:t>hopper</a:t>
             </a:r>
             <a:endParaRPr lang="en-US" sz="2800" dirty="0"/>
           </a:p>
@@ -27623,11 +27386,11 @@
             </a:avLst>
           </a:prstGeom>
           <a:solidFill>
-            <a:srgbClr val="DDD6FE"/>
+            <a:srgbClr val="CCFBF1"/>
           </a:solidFill>
           <a:ln w="19050">
             <a:solidFill>
-              <a:srgbClr val="7C3AED"/>
+              <a:srgbClr val="0D9488"/>
             </a:solidFill>
             <a:prstDash val="solid"/>
           </a:ln>
@@ -27667,13 +27430,13 @@
             <a:r>
               <a:rPr lang="en-US" sz="1300" b="1" dirty="0">
                 <a:solidFill>
-                  <a:srgbClr val="4C1D95"/>
+                  <a:srgbClr val="0F766E"/>
                 </a:solidFill>
                 <a:latin typeface="Trebuchet MS" pitchFamily="34" charset="0"/>
                 <a:ea typeface="Trebuchet MS" pitchFamily="34" charset="-122"/>
                 <a:cs typeface="Trebuchet MS" pitchFamily="34" charset="-120"/>
               </a:rPr>
-              <a:t>skip</a:t>
+              <a:t>hop</a:t>
             </a:r>
             <a:endParaRPr lang="en-US" sz="1300" dirty="0"/>
           </a:p>
@@ -27712,7 +27475,7 @@
                 <a:ea typeface="Calibri" pitchFamily="34" charset="-122"/>
                 <a:cs typeface="Calibri" pitchFamily="34" charset="-120"/>
               </a:rPr>
-              <a:t>to leap lightly</a:t>
+              <a:t>to jump</a:t>
             </a:r>
             <a:endParaRPr lang="en-US" sz="850" dirty="0"/>
           </a:p>
@@ -27863,7 +27626,7 @@
                 <a:ea typeface="Calibri" pitchFamily="34" charset="-122"/>
                 <a:cs typeface="Calibri" pitchFamily="34" charset="-120"/>
               </a:rPr>
-              <a:t>final consonant doubled before vowel suffix</a:t>
+              <a:t>consonant doubled before vowel suffix</a:t>
             </a:r>
             <a:endParaRPr lang="en-US" sz="700" dirty="0"/>
           </a:p>
@@ -27936,7 +27699,7 @@
                 <a:ea typeface="Trebuchet MS" pitchFamily="34" charset="-122"/>
                 <a:cs typeface="Trebuchet MS" pitchFamily="34" charset="-120"/>
               </a:rPr>
-              <a:t>ing</a:t>
+              <a:t>er</a:t>
             </a:r>
             <a:endParaRPr lang="en-US" sz="1300" dirty="0"/>
           </a:p>
@@ -27975,7 +27738,7 @@
                 <a:ea typeface="Calibri" pitchFamily="34" charset="-122"/>
                 <a:cs typeface="Calibri" pitchFamily="34" charset="-120"/>
               </a:rPr>
-              <a:t>action happening now</a:t>
+              <a:t>one who does something</a:t>
             </a:r>
             <a:endParaRPr lang="en-US" sz="850" dirty="0"/>
           </a:p>
@@ -28134,7 +27897,7 @@
                 <a:ea typeface="Trebuchet MS" pitchFamily="34" charset="-122"/>
                 <a:cs typeface="Trebuchet MS" pitchFamily="34" charset="-120"/>
               </a:rPr>
-              <a:t>skip</a:t>
+              <a:t>hop</a:t>
             </a:r>
             <a:endParaRPr lang="en-US" sz="1400" dirty="0"/>
           </a:p>
@@ -28239,7 +28002,7 @@
                 <a:ea typeface="Trebuchet MS" pitchFamily="34" charset="-122"/>
                 <a:cs typeface="Trebuchet MS" pitchFamily="34" charset="-120"/>
               </a:rPr>
-              <a:t>ping</a:t>
+              <a:t>per</a:t>
             </a:r>
             <a:endParaRPr lang="en-US" sz="1400" dirty="0"/>
           </a:p>
@@ -28346,7 +28109,7 @@
         </p:nvSpPr>
         <p:spPr>
           <a:xfrm>
-            <a:off x="2254649" y="4169664"/>
+            <a:off x="2670048" y="4169664"/>
             <a:ext cx="685800" cy="475488"/>
           </a:xfrm>
           <a:prstGeom prst="rect">
@@ -28373,7 +28136,7 @@
         </p:nvSpPr>
         <p:spPr>
           <a:xfrm>
-            <a:off x="2254649" y="4169664"/>
+            <a:off x="2670048" y="4169664"/>
             <a:ext cx="685800" cy="475488"/>
           </a:xfrm>
           <a:prstGeom prst="rect">
@@ -28398,7 +28161,7 @@
                 <a:ea typeface="Trebuchet MS" pitchFamily="34" charset="-122"/>
                 <a:cs typeface="Trebuchet MS" pitchFamily="34" charset="-120"/>
               </a:rPr>
-              <a:t>s</a:t>
+              <a:t>h</a:t>
             </a:r>
             <a:endParaRPr lang="en-US" sz="900" dirty="0"/>
           </a:p>
@@ -28412,7 +28175,7 @@
         </p:nvSpPr>
         <p:spPr>
           <a:xfrm>
-            <a:off x="3293146" y="4169664"/>
+            <a:off x="4123944" y="4169664"/>
             <a:ext cx="685800" cy="475488"/>
           </a:xfrm>
           <a:prstGeom prst="rect">
@@ -28439,7 +28202,7 @@
         </p:nvSpPr>
         <p:spPr>
           <a:xfrm>
-            <a:off x="3293146" y="4169664"/>
+            <a:off x="4123944" y="4169664"/>
             <a:ext cx="685800" cy="475488"/>
           </a:xfrm>
           <a:prstGeom prst="rect">
@@ -28464,7 +28227,7 @@
                 <a:ea typeface="Trebuchet MS" pitchFamily="34" charset="-122"/>
                 <a:cs typeface="Trebuchet MS" pitchFamily="34" charset="-120"/>
               </a:rPr>
-              <a:t>k</a:t>
+              <a:t>o</a:t>
             </a:r>
             <a:endParaRPr lang="en-US" sz="900" dirty="0"/>
           </a:p>
@@ -28478,7 +28241,7 @@
         </p:nvSpPr>
         <p:spPr>
           <a:xfrm>
-            <a:off x="4331643" y="4169664"/>
+            <a:off x="5577840" y="4169664"/>
             <a:ext cx="685800" cy="475488"/>
           </a:xfrm>
           <a:prstGeom prst="rect">
@@ -28505,7 +28268,7 @@
         </p:nvSpPr>
         <p:spPr>
           <a:xfrm>
-            <a:off x="4331643" y="4169664"/>
+            <a:off x="5577840" y="4169664"/>
             <a:ext cx="685800" cy="475488"/>
           </a:xfrm>
           <a:prstGeom prst="rect">
@@ -28530,7 +28293,7 @@
                 <a:ea typeface="Trebuchet MS" pitchFamily="34" charset="-122"/>
                 <a:cs typeface="Trebuchet MS" pitchFamily="34" charset="-120"/>
               </a:rPr>
-              <a:t>i</a:t>
+              <a:t>pp</a:t>
             </a:r>
             <a:endParaRPr lang="en-US" sz="900" dirty="0"/>
           </a:p>
@@ -28544,7 +28307,7 @@
         </p:nvSpPr>
         <p:spPr>
           <a:xfrm>
-            <a:off x="5370141" y="4169664"/>
+            <a:off x="7031736" y="4169664"/>
             <a:ext cx="685800" cy="475488"/>
           </a:xfrm>
           <a:prstGeom prst="rect">
@@ -28571,7 +28334,7 @@
         </p:nvSpPr>
         <p:spPr>
           <a:xfrm>
-            <a:off x="5370141" y="4169664"/>
+            <a:off x="7031736" y="4169664"/>
             <a:ext cx="685800" cy="475488"/>
           </a:xfrm>
           <a:prstGeom prst="rect">
@@ -28596,139 +28359,7 @@
                 <a:ea typeface="Trebuchet MS" pitchFamily="34" charset="-122"/>
                 <a:cs typeface="Trebuchet MS" pitchFamily="34" charset="-120"/>
               </a:rPr>
-              <a:t>pp</a:t>
-            </a:r>
-            <a:endParaRPr lang="en-US" sz="900" dirty="0"/>
-          </a:p>
-        </p:txBody>
-      </p:sp>
-      <p:sp>
-        <p:nvSpPr>
-          <p:cNvPr id="45" name="Shape 43"/>
-          <p:cNvSpPr/>
-          <p:nvPr/>
-        </p:nvSpPr>
-        <p:spPr>
-          <a:xfrm>
-            <a:off x="6408638" y="4169664"/>
-            <a:ext cx="685800" cy="475488"/>
-          </a:xfrm>
-          <a:prstGeom prst="rect">
-            <a:avLst>
-              <a:gd name="adj" fmla="val 7692"/>
-            </a:avLst>
-          </a:prstGeom>
-          <a:solidFill>
-            <a:srgbClr val="FFFFFF"/>
-          </a:solidFill>
-          <a:ln w="12700">
-            <a:solidFill>
-              <a:srgbClr val="DB2777"/>
-            </a:solidFill>
-            <a:prstDash val="solid"/>
-          </a:ln>
-        </p:spPr>
-      </p:sp>
-      <p:sp>
-        <p:nvSpPr>
-          <p:cNvPr id="46" name="Text 44"/>
-          <p:cNvSpPr/>
-          <p:nvPr/>
-        </p:nvSpPr>
-        <p:spPr>
-          <a:xfrm>
-            <a:off x="6408638" y="4169664"/>
-            <a:ext cx="685800" cy="475488"/>
-          </a:xfrm>
-          <a:prstGeom prst="rect">
-            <a:avLst/>
-          </a:prstGeom>
-          <a:noFill/>
-          <a:ln/>
-        </p:spPr>
-        <p:txBody>
-          <a:bodyPr wrap="square" lIns="0" tIns="0" rIns="0" bIns="0" rtlCol="0" anchor="ctr"/>
-          <a:lstStyle/>
-          <a:p>
-            <a:pPr algn="ctr" indent="0" marL="0">
-              <a:buNone/>
-            </a:pPr>
-            <a:r>
-              <a:rPr lang="en-US" sz="900" b="1" dirty="0">
-                <a:solidFill>
-                  <a:srgbClr val="9D174D"/>
-                </a:solidFill>
-                <a:latin typeface="Trebuchet MS" pitchFamily="34" charset="0"/>
-                <a:ea typeface="Trebuchet MS" pitchFamily="34" charset="-122"/>
-                <a:cs typeface="Trebuchet MS" pitchFamily="34" charset="-120"/>
-              </a:rPr>
-              <a:t>i</a:t>
-            </a:r>
-            <a:endParaRPr lang="en-US" sz="900" dirty="0"/>
-          </a:p>
-        </p:txBody>
-      </p:sp>
-      <p:sp>
-        <p:nvSpPr>
-          <p:cNvPr id="47" name="Shape 45"/>
-          <p:cNvSpPr/>
-          <p:nvPr/>
-        </p:nvSpPr>
-        <p:spPr>
-          <a:xfrm>
-            <a:off x="7447135" y="4169664"/>
-            <a:ext cx="685800" cy="475488"/>
-          </a:xfrm>
-          <a:prstGeom prst="rect">
-            <a:avLst>
-              <a:gd name="adj" fmla="val 7692"/>
-            </a:avLst>
-          </a:prstGeom>
-          <a:solidFill>
-            <a:srgbClr val="FFFFFF"/>
-          </a:solidFill>
-          <a:ln w="12700">
-            <a:solidFill>
-              <a:srgbClr val="DB2777"/>
-            </a:solidFill>
-            <a:prstDash val="solid"/>
-          </a:ln>
-        </p:spPr>
-      </p:sp>
-      <p:sp>
-        <p:nvSpPr>
-          <p:cNvPr id="48" name="Text 46"/>
-          <p:cNvSpPr/>
-          <p:nvPr/>
-        </p:nvSpPr>
-        <p:spPr>
-          <a:xfrm>
-            <a:off x="7447135" y="4169664"/>
-            <a:ext cx="685800" cy="475488"/>
-          </a:xfrm>
-          <a:prstGeom prst="rect">
-            <a:avLst/>
-          </a:prstGeom>
-          <a:noFill/>
-          <a:ln/>
-        </p:spPr>
-        <p:txBody>
-          <a:bodyPr wrap="square" lIns="0" tIns="0" rIns="0" bIns="0" rtlCol="0" anchor="ctr"/>
-          <a:lstStyle/>
-          <a:p>
-            <a:pPr algn="ctr" indent="0" marL="0">
-              <a:buNone/>
-            </a:pPr>
-            <a:r>
-              <a:rPr lang="en-US" sz="900" b="1" dirty="0">
-                <a:solidFill>
-                  <a:srgbClr val="9D174D"/>
-                </a:solidFill>
-                <a:latin typeface="Trebuchet MS" pitchFamily="34" charset="0"/>
-                <a:ea typeface="Trebuchet MS" pitchFamily="34" charset="-122"/>
-                <a:cs typeface="Trebuchet MS" pitchFamily="34" charset="-120"/>
-              </a:rPr>
-              <a:t>ng</a:t>
+              <a:t>er</a:t>
             </a:r>
             <a:endParaRPr lang="en-US" sz="900" dirty="0"/>
           </a:p>
@@ -29159,7 +28790,7 @@
                 <a:ea typeface="Trebuchet MS" pitchFamily="34" charset="-122"/>
                 <a:cs typeface="Trebuchet MS" pitchFamily="34" charset="-120"/>
               </a:rPr>
-              <a:t>hopper</a:t>
+              <a:t>hopscotch</a:t>
             </a:r>
             <a:endParaRPr lang="en-US" sz="2800" dirty="0"/>
           </a:p>
@@ -29986,7 +29617,7 @@
                 <a:ea typeface="Trebuchet MS" pitchFamily="34" charset="-122"/>
                 <a:cs typeface="Trebuchet MS" pitchFamily="34" charset="-120"/>
               </a:rPr>
-              <a:t>hopper</a:t>
+              <a:t>hopscotch</a:t>
             </a:r>
             <a:endParaRPr lang="en-US" sz="2800" dirty="0"/>
           </a:p>
@@ -30066,7 +29697,7 @@
         </p:nvSpPr>
         <p:spPr>
           <a:xfrm>
-            <a:off x="2221992" y="2258568"/>
+            <a:off x="2938272" y="2258568"/>
             <a:ext cx="1828800" cy="292608"/>
           </a:xfrm>
           <a:prstGeom prst="rect">
@@ -30100,7 +29731,7 @@
         </p:nvSpPr>
         <p:spPr>
           <a:xfrm>
-            <a:off x="2221992" y="2258568"/>
+            <a:off x="2938272" y="2258568"/>
             <a:ext cx="1828800" cy="292608"/>
           </a:xfrm>
           <a:prstGeom prst="rect">
@@ -30139,7 +29770,7 @@
         </p:nvSpPr>
         <p:spPr>
           <a:xfrm>
-            <a:off x="2221992" y="2569464"/>
+            <a:off x="2938272" y="2569464"/>
             <a:ext cx="1828800" cy="201168"/>
           </a:xfrm>
           <a:prstGeom prst="rect">
@@ -30178,7 +29809,7 @@
         </p:nvSpPr>
         <p:spPr>
           <a:xfrm>
-            <a:off x="4370832" y="2258568"/>
+            <a:off x="5803392" y="2258568"/>
             <a:ext cx="1828800" cy="292608"/>
           </a:xfrm>
           <a:prstGeom prst="rect">
@@ -30212,7 +29843,7 @@
         </p:nvSpPr>
         <p:spPr>
           <a:xfrm>
-            <a:off x="4370832" y="2258568"/>
+            <a:off x="5803392" y="2258568"/>
             <a:ext cx="1828800" cy="292608"/>
           </a:xfrm>
           <a:prstGeom prst="rect">
@@ -30237,7 +29868,7 @@
                 <a:ea typeface="Trebuchet MS" pitchFamily="34" charset="-122"/>
                 <a:cs typeface="Trebuchet MS" pitchFamily="34" charset="-120"/>
               </a:rPr>
-              <a:t>p</a:t>
+              <a:t>scotch</a:t>
             </a:r>
             <a:endParaRPr lang="en-US" sz="1300" dirty="0"/>
           </a:p>
@@ -30251,7 +29882,7 @@
         </p:nvSpPr>
         <p:spPr>
           <a:xfrm>
-            <a:off x="4370832" y="2569464"/>
+            <a:off x="5803392" y="2569464"/>
             <a:ext cx="1828800" cy="201168"/>
           </a:xfrm>
           <a:prstGeom prst="rect">
@@ -30276,7 +29907,7 @@
                 <a:ea typeface="Calibri" pitchFamily="34" charset="-122"/>
                 <a:cs typeface="Calibri" pitchFamily="34" charset="-120"/>
               </a:rPr>
-              <a:t>doubled consonant</a:t>
+              <a:t>scoring scratch or mark</a:t>
             </a:r>
             <a:endParaRPr lang="en-US" sz="850" dirty="0"/>
           </a:p>
@@ -30284,87 +29915,173 @@
       </p:sp>
       <p:sp>
         <p:nvSpPr>
-          <p:cNvPr id="22" name="Text 20"/>
-          <p:cNvSpPr/>
-          <p:nvPr/>
-        </p:nvSpPr>
-        <p:spPr>
-          <a:xfrm>
-            <a:off x="4370832" y="2752344"/>
-            <a:ext cx="1828800" cy="182880"/>
-          </a:xfrm>
-          <a:prstGeom prst="rect">
-            <a:avLst/>
-          </a:prstGeom>
-          <a:noFill/>
-          <a:ln/>
-        </p:spPr>
-        <p:txBody>
-          <a:bodyPr wrap="square" lIns="0" tIns="0" rIns="0" bIns="0" rtlCol="0" anchor="t"/>
-          <a:lstStyle/>
-          <a:p>
-            <a:pPr algn="ctr" indent="0" marL="0">
-              <a:buNone/>
-            </a:pPr>
-            <a:r>
-              <a:rPr lang="en-US" sz="700" i="1" dirty="0">
-                <a:solidFill>
-                  <a:srgbClr val="94A3B8"/>
+          <p:cNvPr id="22" name="Shape 20"/>
+          <p:cNvSpPr/>
+          <p:nvPr/>
+        </p:nvSpPr>
+        <p:spPr>
+          <a:xfrm>
+            <a:off x="365760" y="3273552"/>
+            <a:ext cx="1371600" cy="658368"/>
+          </a:xfrm>
+          <a:prstGeom prst="rect">
+            <a:avLst>
+              <a:gd name="adj" fmla="val 8333"/>
+            </a:avLst>
+          </a:prstGeom>
+          <a:solidFill>
+            <a:srgbClr val="E2E8F0"/>
+          </a:solidFill>
+          <a:ln w="12700">
+            <a:solidFill>
+              <a:srgbClr val="E2E8F0"/>
+            </a:solidFill>
+            <a:prstDash val="solid"/>
+          </a:ln>
+        </p:spPr>
+      </p:sp>
+      <p:sp>
+        <p:nvSpPr>
+          <p:cNvPr id="23" name="Text 21"/>
+          <p:cNvSpPr/>
+          <p:nvPr/>
+        </p:nvSpPr>
+        <p:spPr>
+          <a:xfrm>
+            <a:off x="365760" y="3273552"/>
+            <a:ext cx="1371600" cy="658368"/>
+          </a:xfrm>
+          <a:prstGeom prst="rect">
+            <a:avLst/>
+          </a:prstGeom>
+          <a:noFill/>
+          <a:ln/>
+        </p:spPr>
+        <p:txBody>
+          <a:bodyPr wrap="square" lIns="0" tIns="0" rIns="0" bIns="0" rtlCol="0" anchor="ctr"/>
+          <a:lstStyle/>
+          <a:p>
+            <a:pPr algn="ctr" indent="0" marL="0">
+              <a:buNone/>
+            </a:pPr>
+            <a:r>
+              <a:rPr lang="en-US" sz="1100" b="1" dirty="0">
+                <a:solidFill>
+                  <a:srgbClr val="475569"/>
+                </a:solidFill>
+                <a:latin typeface="Trebuchet MS" pitchFamily="34" charset="0"/>
+                <a:ea typeface="Trebuchet MS" pitchFamily="34" charset="-122"/>
+                <a:cs typeface="Trebuchet MS" pitchFamily="34" charset="-120"/>
+              </a:rPr>
+              <a:t>Syllables</a:t>
+            </a:r>
+            <a:endParaRPr lang="en-US" sz="1100" dirty="0"/>
+          </a:p>
+        </p:txBody>
+      </p:sp>
+      <p:sp>
+        <p:nvSpPr>
+          <p:cNvPr id="24" name="Shape 22"/>
+          <p:cNvSpPr/>
+          <p:nvPr/>
+        </p:nvSpPr>
+        <p:spPr>
+          <a:xfrm>
+            <a:off x="1874520" y="3273552"/>
+            <a:ext cx="6903720" cy="658368"/>
+          </a:xfrm>
+          <a:prstGeom prst="rect">
+            <a:avLst>
+              <a:gd name="adj" fmla="val 8333"/>
+            </a:avLst>
+          </a:prstGeom>
+          <a:solidFill>
+            <a:srgbClr val="F8FAFC"/>
+          </a:solidFill>
+          <a:ln w="12700">
+            <a:solidFill>
+              <a:srgbClr val="E2E8F0"/>
+            </a:solidFill>
+            <a:prstDash val="dash"/>
+          </a:ln>
+        </p:spPr>
+      </p:sp>
+      <p:sp>
+        <p:nvSpPr>
+          <p:cNvPr id="25" name="Text 23"/>
+          <p:cNvSpPr/>
+          <p:nvPr/>
+        </p:nvSpPr>
+        <p:spPr>
+          <a:xfrm>
+            <a:off x="1874520" y="3273552"/>
+            <a:ext cx="6903720" cy="658368"/>
+          </a:xfrm>
+          <a:prstGeom prst="rect">
+            <a:avLst/>
+          </a:prstGeom>
+          <a:noFill/>
+          <a:ln/>
+        </p:spPr>
+        <p:txBody>
+          <a:bodyPr wrap="square" rtlCol="0" anchor="ctr"/>
+          <a:lstStyle/>
+          <a:p>
+            <a:pPr algn="ctr" indent="0" marL="0">
+              <a:buNone/>
+            </a:pPr>
+            <a:r>
+              <a:rPr lang="en-US" sz="1100" i="1" dirty="0">
+                <a:solidFill>
+                  <a:srgbClr val="CBD5E1"/>
                 </a:solidFill>
                 <a:latin typeface="Calibri" pitchFamily="34" charset="0"/>
                 <a:ea typeface="Calibri" pitchFamily="34" charset="-122"/>
                 <a:cs typeface="Calibri" pitchFamily="34" charset="-120"/>
               </a:rPr>
-              <a:t>final consonant doubled before vowel suffix</a:t>
-            </a:r>
-            <a:endParaRPr lang="en-US" sz="700" dirty="0"/>
-          </a:p>
-        </p:txBody>
-      </p:sp>
-      <p:sp>
-        <p:nvSpPr>
-          <p:cNvPr id="23" name="Shape 21"/>
-          <p:cNvSpPr/>
-          <p:nvPr/>
-        </p:nvSpPr>
-        <p:spPr>
-          <a:xfrm>
-            <a:off x="6519672" y="2258568"/>
-            <a:ext cx="1828800" cy="292608"/>
+              <a:t>Write here...</a:t>
+            </a:r>
+            <a:endParaRPr lang="en-US" sz="1100" dirty="0"/>
+          </a:p>
+        </p:txBody>
+      </p:sp>
+      <p:sp>
+        <p:nvSpPr>
+          <p:cNvPr id="26" name="Shape 24"/>
+          <p:cNvSpPr/>
+          <p:nvPr/>
+        </p:nvSpPr>
+        <p:spPr>
+          <a:xfrm>
+            <a:off x="365760" y="4096512"/>
+            <a:ext cx="1371600" cy="804672"/>
           </a:xfrm>
           <a:prstGeom prst="rect">
             <a:avLst>
-              <a:gd name="adj" fmla="val 25000"/>
+              <a:gd name="adj" fmla="val 6818"/>
             </a:avLst>
           </a:prstGeom>
           <a:solidFill>
-            <a:srgbClr val="FCE7F3"/>
-          </a:solidFill>
-          <a:ln w="19050">
-            <a:solidFill>
-              <a:srgbClr val="DB2777"/>
-            </a:solidFill>
-            <a:prstDash val="solid"/>
-          </a:ln>
-          <a:effectLst>
-            <a:outerShdw sx="100000" sy="100000" kx="0" ky="0" algn="bl" rotWithShape="0" blurRad="101600" dist="38100" dir="8100000">
-              <a:srgbClr val="000000">
-                <a:alpha val="12000"/>
-              </a:srgbClr>
-            </a:outerShdw>
-          </a:effectLst>
-        </p:spPr>
-      </p:sp>
-      <p:sp>
-        <p:nvSpPr>
-          <p:cNvPr id="24" name="Text 22"/>
-          <p:cNvSpPr/>
-          <p:nvPr/>
-        </p:nvSpPr>
-        <p:spPr>
-          <a:xfrm>
-            <a:off x="6519672" y="2258568"/>
-            <a:ext cx="1828800" cy="292608"/>
+            <a:srgbClr val="E2E8F0"/>
+          </a:solidFill>
+          <a:ln w="12700">
+            <a:solidFill>
+              <a:srgbClr val="E2E8F0"/>
+            </a:solidFill>
+            <a:prstDash val="solid"/>
+          </a:ln>
+        </p:spPr>
+      </p:sp>
+      <p:sp>
+        <p:nvSpPr>
+          <p:cNvPr id="27" name="Text 25"/>
+          <p:cNvSpPr/>
+          <p:nvPr/>
+        </p:nvSpPr>
+        <p:spPr>
+          <a:xfrm>
+            <a:off x="365760" y="4096512"/>
+            <a:ext cx="1371600" cy="804672"/>
           </a:xfrm>
           <a:prstGeom prst="rect">
             <a:avLst/>
@@ -30380,120 +30097,15 @@
               <a:buNone/>
             </a:pPr>
             <a:r>
-              <a:rPr lang="en-US" sz="1300" b="1" dirty="0">
-                <a:solidFill>
-                  <a:srgbClr val="9D174D"/>
+              <a:rPr lang="en-US" sz="1100" b="1" dirty="0">
+                <a:solidFill>
+                  <a:srgbClr val="475569"/>
                 </a:solidFill>
                 <a:latin typeface="Trebuchet MS" pitchFamily="34" charset="0"/>
                 <a:ea typeface="Trebuchet MS" pitchFamily="34" charset="-122"/>
                 <a:cs typeface="Trebuchet MS" pitchFamily="34" charset="-120"/>
               </a:rPr>
-              <a:t>er</a:t>
-            </a:r>
-            <a:endParaRPr lang="en-US" sz="1300" dirty="0"/>
-          </a:p>
-        </p:txBody>
-      </p:sp>
-      <p:sp>
-        <p:nvSpPr>
-          <p:cNvPr id="25" name="Text 23"/>
-          <p:cNvSpPr/>
-          <p:nvPr/>
-        </p:nvSpPr>
-        <p:spPr>
-          <a:xfrm>
-            <a:off x="6519672" y="2569464"/>
-            <a:ext cx="1828800" cy="201168"/>
-          </a:xfrm>
-          <a:prstGeom prst="rect">
-            <a:avLst/>
-          </a:prstGeom>
-          <a:noFill/>
-          <a:ln/>
-        </p:spPr>
-        <p:txBody>
-          <a:bodyPr wrap="square" lIns="0" tIns="0" rIns="0" bIns="0" rtlCol="0" anchor="t"/>
-          <a:lstStyle/>
-          <a:p>
-            <a:pPr algn="ctr" indent="0" marL="0">
-              <a:buNone/>
-            </a:pPr>
-            <a:r>
-              <a:rPr lang="en-US" sz="850" dirty="0">
-                <a:solidFill>
-                  <a:srgbClr val="475569"/>
-                </a:solidFill>
-                <a:latin typeface="Calibri" pitchFamily="34" charset="0"/>
-                <a:ea typeface="Calibri" pitchFamily="34" charset="-122"/>
-                <a:cs typeface="Calibri" pitchFamily="34" charset="-120"/>
-              </a:rPr>
-              <a:t>one who does</a:t>
-            </a:r>
-            <a:endParaRPr lang="en-US" sz="850" dirty="0"/>
-          </a:p>
-        </p:txBody>
-      </p:sp>
-      <p:sp>
-        <p:nvSpPr>
-          <p:cNvPr id="26" name="Shape 24"/>
-          <p:cNvSpPr/>
-          <p:nvPr/>
-        </p:nvSpPr>
-        <p:spPr>
-          <a:xfrm>
-            <a:off x="365760" y="3273552"/>
-            <a:ext cx="1371600" cy="658368"/>
-          </a:xfrm>
-          <a:prstGeom prst="rect">
-            <a:avLst>
-              <a:gd name="adj" fmla="val 8333"/>
-            </a:avLst>
-          </a:prstGeom>
-          <a:solidFill>
-            <a:srgbClr val="E2E8F0"/>
-          </a:solidFill>
-          <a:ln w="12700">
-            <a:solidFill>
-              <a:srgbClr val="E2E8F0"/>
-            </a:solidFill>
-            <a:prstDash val="solid"/>
-          </a:ln>
-        </p:spPr>
-      </p:sp>
-      <p:sp>
-        <p:nvSpPr>
-          <p:cNvPr id="27" name="Text 25"/>
-          <p:cNvSpPr/>
-          <p:nvPr/>
-        </p:nvSpPr>
-        <p:spPr>
-          <a:xfrm>
-            <a:off x="365760" y="3273552"/>
-            <a:ext cx="1371600" cy="658368"/>
-          </a:xfrm>
-          <a:prstGeom prst="rect">
-            <a:avLst/>
-          </a:prstGeom>
-          <a:noFill/>
-          <a:ln/>
-        </p:spPr>
-        <p:txBody>
-          <a:bodyPr wrap="square" lIns="0" tIns="0" rIns="0" bIns="0" rtlCol="0" anchor="ctr"/>
-          <a:lstStyle/>
-          <a:p>
-            <a:pPr algn="ctr" indent="0" marL="0">
-              <a:buNone/>
-            </a:pPr>
-            <a:r>
-              <a:rPr lang="en-US" sz="1100" b="1" dirty="0">
-                <a:solidFill>
-                  <a:srgbClr val="475569"/>
-                </a:solidFill>
-                <a:latin typeface="Trebuchet MS" pitchFamily="34" charset="0"/>
-                <a:ea typeface="Trebuchet MS" pitchFamily="34" charset="-122"/>
-                <a:cs typeface="Trebuchet MS" pitchFamily="34" charset="-120"/>
-              </a:rPr>
-              <a:t>Syllables</a:t>
+              <a:t>Phonemes</a:t>
             </a:r>
             <a:endParaRPr lang="en-US" sz="1100" dirty="0"/>
           </a:p>
@@ -30507,74 +30119,8 @@
         </p:nvSpPr>
         <p:spPr>
           <a:xfrm>
-            <a:off x="1874520" y="3273552"/>
-            <a:ext cx="6903720" cy="658368"/>
-          </a:xfrm>
-          <a:prstGeom prst="rect">
-            <a:avLst>
-              <a:gd name="adj" fmla="val 8333"/>
-            </a:avLst>
-          </a:prstGeom>
-          <a:solidFill>
-            <a:srgbClr val="F8FAFC"/>
-          </a:solidFill>
-          <a:ln w="12700">
-            <a:solidFill>
-              <a:srgbClr val="E2E8F0"/>
-            </a:solidFill>
-            <a:prstDash val="dash"/>
-          </a:ln>
-        </p:spPr>
-      </p:sp>
-      <p:sp>
-        <p:nvSpPr>
-          <p:cNvPr id="29" name="Text 27"/>
-          <p:cNvSpPr/>
-          <p:nvPr/>
-        </p:nvSpPr>
-        <p:spPr>
-          <a:xfrm>
-            <a:off x="1874520" y="3273552"/>
-            <a:ext cx="6903720" cy="658368"/>
-          </a:xfrm>
-          <a:prstGeom prst="rect">
-            <a:avLst/>
-          </a:prstGeom>
-          <a:noFill/>
-          <a:ln/>
-        </p:spPr>
-        <p:txBody>
-          <a:bodyPr wrap="square" rtlCol="0" anchor="ctr"/>
-          <a:lstStyle/>
-          <a:p>
-            <a:pPr algn="ctr" indent="0" marL="0">
-              <a:buNone/>
-            </a:pPr>
-            <a:r>
-              <a:rPr lang="en-US" sz="1100" i="1" dirty="0">
-                <a:solidFill>
-                  <a:srgbClr val="CBD5E1"/>
-                </a:solidFill>
-                <a:latin typeface="Calibri" pitchFamily="34" charset="0"/>
-                <a:ea typeface="Calibri" pitchFamily="34" charset="-122"/>
-                <a:cs typeface="Calibri" pitchFamily="34" charset="-120"/>
-              </a:rPr>
-              <a:t>Write here...</a:t>
-            </a:r>
-            <a:endParaRPr lang="en-US" sz="1100" dirty="0"/>
-          </a:p>
-        </p:txBody>
-      </p:sp>
-      <p:sp>
-        <p:nvSpPr>
-          <p:cNvPr id="30" name="Shape 28"/>
-          <p:cNvSpPr/>
-          <p:nvPr/>
-        </p:nvSpPr>
-        <p:spPr>
-          <a:xfrm>
-            <a:off x="365760" y="4096512"/>
-            <a:ext cx="1371600" cy="804672"/>
+            <a:off x="1874520" y="4096512"/>
+            <a:ext cx="6903720" cy="804672"/>
           </a:xfrm>
           <a:prstGeom prst="rect">
             <a:avLst>
@@ -30582,85 +30128,19 @@
             </a:avLst>
           </a:prstGeom>
           <a:solidFill>
-            <a:srgbClr val="E2E8F0"/>
+            <a:srgbClr val="F8FAFC"/>
           </a:solidFill>
           <a:ln w="12700">
             <a:solidFill>
               <a:srgbClr val="E2E8F0"/>
             </a:solidFill>
-            <a:prstDash val="solid"/>
-          </a:ln>
-        </p:spPr>
-      </p:sp>
-      <p:sp>
-        <p:nvSpPr>
-          <p:cNvPr id="31" name="Text 29"/>
-          <p:cNvSpPr/>
-          <p:nvPr/>
-        </p:nvSpPr>
-        <p:spPr>
-          <a:xfrm>
-            <a:off x="365760" y="4096512"/>
-            <a:ext cx="1371600" cy="804672"/>
-          </a:xfrm>
-          <a:prstGeom prst="rect">
-            <a:avLst/>
-          </a:prstGeom>
-          <a:noFill/>
-          <a:ln/>
-        </p:spPr>
-        <p:txBody>
-          <a:bodyPr wrap="square" lIns="0" tIns="0" rIns="0" bIns="0" rtlCol="0" anchor="ctr"/>
-          <a:lstStyle/>
-          <a:p>
-            <a:pPr algn="ctr" indent="0" marL="0">
-              <a:buNone/>
-            </a:pPr>
-            <a:r>
-              <a:rPr lang="en-US" sz="1100" b="1" dirty="0">
-                <a:solidFill>
-                  <a:srgbClr val="475569"/>
-                </a:solidFill>
-                <a:latin typeface="Trebuchet MS" pitchFamily="34" charset="0"/>
-                <a:ea typeface="Trebuchet MS" pitchFamily="34" charset="-122"/>
-                <a:cs typeface="Trebuchet MS" pitchFamily="34" charset="-120"/>
-              </a:rPr>
-              <a:t>Phonemes</a:t>
-            </a:r>
-            <a:endParaRPr lang="en-US" sz="1100" dirty="0"/>
-          </a:p>
-        </p:txBody>
-      </p:sp>
-      <p:sp>
-        <p:nvSpPr>
-          <p:cNvPr id="32" name="Shape 30"/>
-          <p:cNvSpPr/>
-          <p:nvPr/>
-        </p:nvSpPr>
-        <p:spPr>
-          <a:xfrm>
-            <a:off x="1874520" y="4096512"/>
-            <a:ext cx="6903720" cy="804672"/>
-          </a:xfrm>
-          <a:prstGeom prst="rect">
-            <a:avLst>
-              <a:gd name="adj" fmla="val 6818"/>
-            </a:avLst>
-          </a:prstGeom>
-          <a:solidFill>
-            <a:srgbClr val="F8FAFC"/>
-          </a:solidFill>
-          <a:ln w="12700">
-            <a:solidFill>
-              <a:srgbClr val="E2E8F0"/>
-            </a:solidFill>
             <a:prstDash val="dash"/>
           </a:ln>
         </p:spPr>
       </p:sp>
       <p:sp>
         <p:nvSpPr>
-          <p:cNvPr id="33" name="Text 31"/>
+          <p:cNvPr id="29" name="Text 27"/>
           <p:cNvSpPr/>
           <p:nvPr/>
         </p:nvSpPr>
@@ -31122,7 +30602,7 @@
                 <a:ea typeface="Trebuchet MS" pitchFamily="34" charset="-122"/>
                 <a:cs typeface="Trebuchet MS" pitchFamily="34" charset="-120"/>
               </a:rPr>
-              <a:t>hopper</a:t>
+              <a:t>hopscotch</a:t>
             </a:r>
             <a:endParaRPr lang="en-US" sz="2800" dirty="0"/>
           </a:p>
@@ -31202,7 +30682,7 @@
         </p:nvSpPr>
         <p:spPr>
           <a:xfrm>
-            <a:off x="2221992" y="2258568"/>
+            <a:off x="2938272" y="2258568"/>
             <a:ext cx="1828800" cy="292608"/>
           </a:xfrm>
           <a:prstGeom prst="rect">
@@ -31236,7 +30716,7 @@
         </p:nvSpPr>
         <p:spPr>
           <a:xfrm>
-            <a:off x="2221992" y="2258568"/>
+            <a:off x="2938272" y="2258568"/>
             <a:ext cx="1828800" cy="292608"/>
           </a:xfrm>
           <a:prstGeom prst="rect">
@@ -31275,7 +30755,7 @@
         </p:nvSpPr>
         <p:spPr>
           <a:xfrm>
-            <a:off x="2221992" y="2569464"/>
+            <a:off x="2938272" y="2569464"/>
             <a:ext cx="1828800" cy="201168"/>
           </a:xfrm>
           <a:prstGeom prst="rect">
@@ -31314,7 +30794,7 @@
         </p:nvSpPr>
         <p:spPr>
           <a:xfrm>
-            <a:off x="4370832" y="2258568"/>
+            <a:off x="5803392" y="2258568"/>
             <a:ext cx="1828800" cy="292608"/>
           </a:xfrm>
           <a:prstGeom prst="rect">
@@ -31348,7 +30828,7 @@
         </p:nvSpPr>
         <p:spPr>
           <a:xfrm>
-            <a:off x="4370832" y="2258568"/>
+            <a:off x="5803392" y="2258568"/>
             <a:ext cx="1828800" cy="292608"/>
           </a:xfrm>
           <a:prstGeom prst="rect">
@@ -31373,7 +30853,7 @@
                 <a:ea typeface="Trebuchet MS" pitchFamily="34" charset="-122"/>
                 <a:cs typeface="Trebuchet MS" pitchFamily="34" charset="-120"/>
               </a:rPr>
-              <a:t>p</a:t>
+              <a:t>scotch</a:t>
             </a:r>
             <a:endParaRPr lang="en-US" sz="1300" dirty="0"/>
           </a:p>
@@ -31387,7 +30867,7 @@
         </p:nvSpPr>
         <p:spPr>
           <a:xfrm>
-            <a:off x="4370832" y="2569464"/>
+            <a:off x="5803392" y="2569464"/>
             <a:ext cx="1828800" cy="201168"/>
           </a:xfrm>
           <a:prstGeom prst="rect">
@@ -31412,7 +30892,7 @@
                 <a:ea typeface="Calibri" pitchFamily="34" charset="-122"/>
                 <a:cs typeface="Calibri" pitchFamily="34" charset="-120"/>
               </a:rPr>
-              <a:t>doubled consonant</a:t>
+              <a:t>scoring scratch or mark</a:t>
             </a:r>
             <a:endParaRPr lang="en-US" sz="850" dirty="0"/>
           </a:p>
@@ -31420,87 +30900,41 @@
       </p:sp>
       <p:sp>
         <p:nvSpPr>
-          <p:cNvPr id="22" name="Text 20"/>
-          <p:cNvSpPr/>
-          <p:nvPr/>
-        </p:nvSpPr>
-        <p:spPr>
-          <a:xfrm>
-            <a:off x="4370832" y="2752344"/>
-            <a:ext cx="1828800" cy="182880"/>
-          </a:xfrm>
-          <a:prstGeom prst="rect">
-            <a:avLst/>
-          </a:prstGeom>
-          <a:noFill/>
-          <a:ln/>
-        </p:spPr>
-        <p:txBody>
-          <a:bodyPr wrap="square" lIns="0" tIns="0" rIns="0" bIns="0" rtlCol="0" anchor="t"/>
-          <a:lstStyle/>
-          <a:p>
-            <a:pPr algn="ctr" indent="0" marL="0">
-              <a:buNone/>
-            </a:pPr>
-            <a:r>
-              <a:rPr lang="en-US" sz="700" i="1" dirty="0">
-                <a:solidFill>
-                  <a:srgbClr val="94A3B8"/>
-                </a:solidFill>
-                <a:latin typeface="Calibri" pitchFamily="34" charset="0"/>
-                <a:ea typeface="Calibri" pitchFamily="34" charset="-122"/>
-                <a:cs typeface="Calibri" pitchFamily="34" charset="-120"/>
-              </a:rPr>
-              <a:t>final consonant doubled before vowel suffix</a:t>
-            </a:r>
-            <a:endParaRPr lang="en-US" sz="700" dirty="0"/>
-          </a:p>
-        </p:txBody>
-      </p:sp>
-      <p:sp>
-        <p:nvSpPr>
-          <p:cNvPr id="23" name="Shape 21"/>
-          <p:cNvSpPr/>
-          <p:nvPr/>
-        </p:nvSpPr>
-        <p:spPr>
-          <a:xfrm>
-            <a:off x="6519672" y="2258568"/>
-            <a:ext cx="1828800" cy="292608"/>
+          <p:cNvPr id="22" name="Shape 20"/>
+          <p:cNvSpPr/>
+          <p:nvPr/>
+        </p:nvSpPr>
+        <p:spPr>
+          <a:xfrm>
+            <a:off x="365760" y="3273552"/>
+            <a:ext cx="1371600" cy="658368"/>
           </a:xfrm>
           <a:prstGeom prst="rect">
             <a:avLst>
-              <a:gd name="adj" fmla="val 25000"/>
+              <a:gd name="adj" fmla="val 8333"/>
             </a:avLst>
           </a:prstGeom>
           <a:solidFill>
-            <a:srgbClr val="FCE7F3"/>
-          </a:solidFill>
-          <a:ln w="19050">
-            <a:solidFill>
-              <a:srgbClr val="DB2777"/>
-            </a:solidFill>
-            <a:prstDash val="solid"/>
-          </a:ln>
-          <a:effectLst>
-            <a:outerShdw sx="100000" sy="100000" kx="0" ky="0" algn="bl" rotWithShape="0" blurRad="101600" dist="38100" dir="8100000">
-              <a:srgbClr val="000000">
-                <a:alpha val="12000"/>
-              </a:srgbClr>
-            </a:outerShdw>
-          </a:effectLst>
-        </p:spPr>
-      </p:sp>
-      <p:sp>
-        <p:nvSpPr>
-          <p:cNvPr id="24" name="Text 22"/>
-          <p:cNvSpPr/>
-          <p:nvPr/>
-        </p:nvSpPr>
-        <p:spPr>
-          <a:xfrm>
-            <a:off x="6519672" y="2258568"/>
-            <a:ext cx="1828800" cy="292608"/>
+            <a:srgbClr val="E2E8F0"/>
+          </a:solidFill>
+          <a:ln w="12700">
+            <a:solidFill>
+              <a:srgbClr val="E2E8F0"/>
+            </a:solidFill>
+            <a:prstDash val="solid"/>
+          </a:ln>
+        </p:spPr>
+      </p:sp>
+      <p:sp>
+        <p:nvSpPr>
+          <p:cNvPr id="23" name="Text 21"/>
+          <p:cNvSpPr/>
+          <p:nvPr/>
+        </p:nvSpPr>
+        <p:spPr>
+          <a:xfrm>
+            <a:off x="365760" y="3273552"/>
+            <a:ext cx="1371600" cy="658368"/>
           </a:xfrm>
           <a:prstGeom prst="rect">
             <a:avLst/>
@@ -31516,69 +30950,30 @@
               <a:buNone/>
             </a:pPr>
             <a:r>
-              <a:rPr lang="en-US" sz="1300" b="1" dirty="0">
-                <a:solidFill>
-                  <a:srgbClr val="9D174D"/>
+              <a:rPr lang="en-US" sz="1100" b="1" dirty="0">
+                <a:solidFill>
+                  <a:srgbClr val="475569"/>
                 </a:solidFill>
                 <a:latin typeface="Trebuchet MS" pitchFamily="34" charset="0"/>
                 <a:ea typeface="Trebuchet MS" pitchFamily="34" charset="-122"/>
                 <a:cs typeface="Trebuchet MS" pitchFamily="34" charset="-120"/>
               </a:rPr>
-              <a:t>er</a:t>
-            </a:r>
-            <a:endParaRPr lang="en-US" sz="1300" dirty="0"/>
-          </a:p>
-        </p:txBody>
-      </p:sp>
-      <p:sp>
-        <p:nvSpPr>
-          <p:cNvPr id="25" name="Text 23"/>
-          <p:cNvSpPr/>
-          <p:nvPr/>
-        </p:nvSpPr>
-        <p:spPr>
-          <a:xfrm>
-            <a:off x="6519672" y="2569464"/>
-            <a:ext cx="1828800" cy="201168"/>
-          </a:xfrm>
-          <a:prstGeom prst="rect">
-            <a:avLst/>
-          </a:prstGeom>
-          <a:noFill/>
-          <a:ln/>
-        </p:spPr>
-        <p:txBody>
-          <a:bodyPr wrap="square" lIns="0" tIns="0" rIns="0" bIns="0" rtlCol="0" anchor="t"/>
-          <a:lstStyle/>
-          <a:p>
-            <a:pPr algn="ctr" indent="0" marL="0">
-              <a:buNone/>
-            </a:pPr>
-            <a:r>
-              <a:rPr lang="en-US" sz="850" dirty="0">
-                <a:solidFill>
-                  <a:srgbClr val="475569"/>
-                </a:solidFill>
-                <a:latin typeface="Calibri" pitchFamily="34" charset="0"/>
-                <a:ea typeface="Calibri" pitchFamily="34" charset="-122"/>
-                <a:cs typeface="Calibri" pitchFamily="34" charset="-120"/>
-              </a:rPr>
-              <a:t>one who does</a:t>
-            </a:r>
-            <a:endParaRPr lang="en-US" sz="850" dirty="0"/>
-          </a:p>
-        </p:txBody>
-      </p:sp>
-      <p:sp>
-        <p:nvSpPr>
-          <p:cNvPr id="26" name="Shape 24"/>
-          <p:cNvSpPr/>
-          <p:nvPr/>
-        </p:nvSpPr>
-        <p:spPr>
-          <a:xfrm>
-            <a:off x="365760" y="3273552"/>
-            <a:ext cx="1371600" cy="658368"/>
+              <a:t>Syllables</a:t>
+            </a:r>
+            <a:endParaRPr lang="en-US" sz="1100" dirty="0"/>
+          </a:p>
+        </p:txBody>
+      </p:sp>
+      <p:sp>
+        <p:nvSpPr>
+          <p:cNvPr id="24" name="Shape 22"/>
+          <p:cNvSpPr/>
+          <p:nvPr/>
+        </p:nvSpPr>
+        <p:spPr>
+          <a:xfrm>
+            <a:off x="1874520" y="3273552"/>
+            <a:ext cx="6903720" cy="658368"/>
           </a:xfrm>
           <a:prstGeom prst="rect">
             <a:avLst>
@@ -31586,26 +30981,53 @@
             </a:avLst>
           </a:prstGeom>
           <a:solidFill>
-            <a:srgbClr val="E2E8F0"/>
-          </a:solidFill>
-          <a:ln w="12700">
-            <a:solidFill>
-              <a:srgbClr val="E2E8F0"/>
-            </a:solidFill>
-            <a:prstDash val="solid"/>
-          </a:ln>
-        </p:spPr>
-      </p:sp>
-      <p:sp>
-        <p:nvSpPr>
-          <p:cNvPr id="27" name="Text 25"/>
-          <p:cNvSpPr/>
-          <p:nvPr/>
-        </p:nvSpPr>
-        <p:spPr>
-          <a:xfrm>
-            <a:off x="365760" y="3273552"/>
-            <a:ext cx="1371600" cy="658368"/>
+            <a:srgbClr val="CCFBF1"/>
+          </a:solidFill>
+          <a:ln w="12700">
+            <a:solidFill>
+              <a:srgbClr val="0D9488"/>
+            </a:solidFill>
+            <a:prstDash val="solid"/>
+          </a:ln>
+        </p:spPr>
+      </p:sp>
+      <p:sp>
+        <p:nvSpPr>
+          <p:cNvPr id="25" name="Shape 23"/>
+          <p:cNvSpPr/>
+          <p:nvPr/>
+        </p:nvSpPr>
+        <p:spPr>
+          <a:xfrm>
+            <a:off x="2999232" y="3364992"/>
+            <a:ext cx="1645920" cy="475488"/>
+          </a:xfrm>
+          <a:prstGeom prst="rect">
+            <a:avLst>
+              <a:gd name="adj" fmla="val 9615"/>
+            </a:avLst>
+          </a:prstGeom>
+          <a:solidFill>
+            <a:srgbClr val="FFFFFF"/>
+          </a:solidFill>
+          <a:ln w="12700">
+            <a:solidFill>
+              <a:srgbClr val="0D9488"/>
+            </a:solidFill>
+            <a:prstDash val="solid"/>
+          </a:ln>
+        </p:spPr>
+      </p:sp>
+      <p:sp>
+        <p:nvSpPr>
+          <p:cNvPr id="26" name="Text 24"/>
+          <p:cNvSpPr/>
+          <p:nvPr/>
+        </p:nvSpPr>
+        <p:spPr>
+          <a:xfrm>
+            <a:off x="2999232" y="3364992"/>
+            <a:ext cx="1645920" cy="475488"/>
           </a:xfrm>
           <a:prstGeom prst="rect">
             <a:avLst/>
@@ -31621,17 +31043,56 @@
               <a:buNone/>
             </a:pPr>
             <a:r>
-              <a:rPr lang="en-US" sz="1100" b="1" dirty="0">
-                <a:solidFill>
-                  <a:srgbClr val="475569"/>
+              <a:rPr lang="en-US" sz="1400" b="1" dirty="0">
+                <a:solidFill>
+                  <a:srgbClr val="0D9488"/>
                 </a:solidFill>
                 <a:latin typeface="Trebuchet MS" pitchFamily="34" charset="0"/>
                 <a:ea typeface="Trebuchet MS" pitchFamily="34" charset="-122"/>
                 <a:cs typeface="Trebuchet MS" pitchFamily="34" charset="-120"/>
               </a:rPr>
-              <a:t>Syllables</a:t>
-            </a:r>
-            <a:endParaRPr lang="en-US" sz="1100" dirty="0"/>
+              <a:t>hop</a:t>
+            </a:r>
+            <a:endParaRPr lang="en-US" sz="1400" dirty="0"/>
+          </a:p>
+        </p:txBody>
+      </p:sp>
+      <p:sp>
+        <p:nvSpPr>
+          <p:cNvPr id="27" name="Text 25"/>
+          <p:cNvSpPr/>
+          <p:nvPr/>
+        </p:nvSpPr>
+        <p:spPr>
+          <a:xfrm>
+            <a:off x="4645152" y="3364992"/>
+            <a:ext cx="1097280" cy="475488"/>
+          </a:xfrm>
+          <a:prstGeom prst="rect">
+            <a:avLst/>
+          </a:prstGeom>
+          <a:noFill/>
+          <a:ln/>
+        </p:spPr>
+        <p:txBody>
+          <a:bodyPr wrap="square" lIns="0" tIns="0" rIns="0" bIns="0" rtlCol="0" anchor="ctr"/>
+          <a:lstStyle/>
+          <a:p>
+            <a:pPr algn="ctr" indent="0" marL="0">
+              <a:buNone/>
+            </a:pPr>
+            <a:r>
+              <a:rPr lang="en-US" sz="1600" b="1" dirty="0">
+                <a:solidFill>
+                  <a:srgbClr val="0D9488"/>
+                </a:solidFill>
+                <a:latin typeface="Trebuchet MS" pitchFamily="34" charset="0"/>
+                <a:ea typeface="Trebuchet MS" pitchFamily="34" charset="-122"/>
+                <a:cs typeface="Trebuchet MS" pitchFamily="34" charset="-120"/>
+              </a:rPr>
+              <a:t>·</a:t>
+            </a:r>
+            <a:endParaRPr lang="en-US" sz="1600" dirty="0"/>
           </a:p>
         </p:txBody>
       </p:sp>
@@ -31643,34 +31104,7 @@
         </p:nvSpPr>
         <p:spPr>
           <a:xfrm>
-            <a:off x="1874520" y="3273552"/>
-            <a:ext cx="6903720" cy="658368"/>
-          </a:xfrm>
-          <a:prstGeom prst="rect">
-            <a:avLst>
-              <a:gd name="adj" fmla="val 8333"/>
-            </a:avLst>
-          </a:prstGeom>
-          <a:solidFill>
-            <a:srgbClr val="CCFBF1"/>
-          </a:solidFill>
-          <a:ln w="12700">
-            <a:solidFill>
-              <a:srgbClr val="0D9488"/>
-            </a:solidFill>
-            <a:prstDash val="solid"/>
-          </a:ln>
-        </p:spPr>
-      </p:sp>
-      <p:sp>
-        <p:nvSpPr>
-          <p:cNvPr id="29" name="Shape 27"/>
-          <p:cNvSpPr/>
-          <p:nvPr/>
-        </p:nvSpPr>
-        <p:spPr>
-          <a:xfrm>
-            <a:off x="2999232" y="3364992"/>
+            <a:off x="5742432" y="3364992"/>
             <a:ext cx="1645920" cy="475488"/>
           </a:xfrm>
           <a:prstGeom prst="rect">
@@ -31691,13 +31125,13 @@
       </p:sp>
       <p:sp>
         <p:nvSpPr>
-          <p:cNvPr id="30" name="Text 28"/>
-          <p:cNvSpPr/>
-          <p:nvPr/>
-        </p:nvSpPr>
-        <p:spPr>
-          <a:xfrm>
-            <a:off x="2999232" y="3364992"/>
+          <p:cNvPr id="29" name="Text 27"/>
+          <p:cNvSpPr/>
+          <p:nvPr/>
+        </p:nvSpPr>
+        <p:spPr>
+          <a:xfrm>
+            <a:off x="5742432" y="3364992"/>
             <a:ext cx="1645920" cy="475488"/>
           </a:xfrm>
           <a:prstGeom prst="rect">
@@ -31722,7 +31156,7 @@
                 <a:ea typeface="Trebuchet MS" pitchFamily="34" charset="-122"/>
                 <a:cs typeface="Trebuchet MS" pitchFamily="34" charset="-120"/>
               </a:rPr>
-              <a:t>hop</a:t>
+              <a:t>scotch</a:t>
             </a:r>
             <a:endParaRPr lang="en-US" sz="1400" dirty="0"/>
           </a:p>
@@ -31730,14 +31164,41 @@
       </p:sp>
       <p:sp>
         <p:nvSpPr>
+          <p:cNvPr id="30" name="Shape 28"/>
+          <p:cNvSpPr/>
+          <p:nvPr/>
+        </p:nvSpPr>
+        <p:spPr>
+          <a:xfrm>
+            <a:off x="365760" y="4096512"/>
+            <a:ext cx="1371600" cy="804672"/>
+          </a:xfrm>
+          <a:prstGeom prst="rect">
+            <a:avLst>
+              <a:gd name="adj" fmla="val 6818"/>
+            </a:avLst>
+          </a:prstGeom>
+          <a:solidFill>
+            <a:srgbClr val="E2E8F0"/>
+          </a:solidFill>
+          <a:ln w="12700">
+            <a:solidFill>
+              <a:srgbClr val="E2E8F0"/>
+            </a:solidFill>
+            <a:prstDash val="solid"/>
+          </a:ln>
+        </p:spPr>
+      </p:sp>
+      <p:sp>
+        <p:nvSpPr>
           <p:cNvPr id="31" name="Text 29"/>
           <p:cNvSpPr/>
           <p:nvPr/>
         </p:nvSpPr>
         <p:spPr>
           <a:xfrm>
-            <a:off x="4645152" y="3364992"/>
-            <a:ext cx="1097280" cy="475488"/>
+            <a:off x="365760" y="4096512"/>
+            <a:ext cx="1371600" cy="804672"/>
           </a:xfrm>
           <a:prstGeom prst="rect">
             <a:avLst/>
@@ -31753,17 +31214,17 @@
               <a:buNone/>
             </a:pPr>
             <a:r>
-              <a:rPr lang="en-US" sz="1600" b="1" dirty="0">
-                <a:solidFill>
-                  <a:srgbClr val="0D9488"/>
+              <a:rPr lang="en-US" sz="1100" b="1" dirty="0">
+                <a:solidFill>
+                  <a:srgbClr val="475569"/>
                 </a:solidFill>
                 <a:latin typeface="Trebuchet MS" pitchFamily="34" charset="0"/>
                 <a:ea typeface="Trebuchet MS" pitchFamily="34" charset="-122"/>
                 <a:cs typeface="Trebuchet MS" pitchFamily="34" charset="-120"/>
               </a:rPr>
-              <a:t>·</a:t>
-            </a:r>
-            <a:endParaRPr lang="en-US" sz="1600" dirty="0"/>
+              <a:t>Phonemes</a:t>
+            </a:r>
+            <a:endParaRPr lang="en-US" sz="1100" dirty="0"/>
           </a:p>
         </p:txBody>
       </p:sp>
@@ -31775,74 +31236,8 @@
         </p:nvSpPr>
         <p:spPr>
           <a:xfrm>
-            <a:off x="5742432" y="3364992"/>
-            <a:ext cx="1645920" cy="475488"/>
-          </a:xfrm>
-          <a:prstGeom prst="rect">
-            <a:avLst>
-              <a:gd name="adj" fmla="val 9615"/>
-            </a:avLst>
-          </a:prstGeom>
-          <a:solidFill>
-            <a:srgbClr val="FFFFFF"/>
-          </a:solidFill>
-          <a:ln w="12700">
-            <a:solidFill>
-              <a:srgbClr val="0D9488"/>
-            </a:solidFill>
-            <a:prstDash val="solid"/>
-          </a:ln>
-        </p:spPr>
-      </p:sp>
-      <p:sp>
-        <p:nvSpPr>
-          <p:cNvPr id="33" name="Text 31"/>
-          <p:cNvSpPr/>
-          <p:nvPr/>
-        </p:nvSpPr>
-        <p:spPr>
-          <a:xfrm>
-            <a:off x="5742432" y="3364992"/>
-            <a:ext cx="1645920" cy="475488"/>
-          </a:xfrm>
-          <a:prstGeom prst="rect">
-            <a:avLst/>
-          </a:prstGeom>
-          <a:noFill/>
-          <a:ln/>
-        </p:spPr>
-        <p:txBody>
-          <a:bodyPr wrap="square" lIns="0" tIns="0" rIns="0" bIns="0" rtlCol="0" anchor="ctr"/>
-          <a:lstStyle/>
-          <a:p>
-            <a:pPr algn="ctr" indent="0" marL="0">
-              <a:buNone/>
-            </a:pPr>
-            <a:r>
-              <a:rPr lang="en-US" sz="1400" b="1" dirty="0">
-                <a:solidFill>
-                  <a:srgbClr val="0D9488"/>
-                </a:solidFill>
-                <a:latin typeface="Trebuchet MS" pitchFamily="34" charset="0"/>
-                <a:ea typeface="Trebuchet MS" pitchFamily="34" charset="-122"/>
-                <a:cs typeface="Trebuchet MS" pitchFamily="34" charset="-120"/>
-              </a:rPr>
-              <a:t>per</a:t>
-            </a:r>
-            <a:endParaRPr lang="en-US" sz="1400" dirty="0"/>
-          </a:p>
-        </p:txBody>
-      </p:sp>
-      <p:sp>
-        <p:nvSpPr>
-          <p:cNvPr id="34" name="Shape 32"/>
-          <p:cNvSpPr/>
-          <p:nvPr/>
-        </p:nvSpPr>
-        <p:spPr>
-          <a:xfrm>
-            <a:off x="365760" y="4096512"/>
-            <a:ext cx="1371600" cy="804672"/>
+            <a:off x="1874520" y="4096512"/>
+            <a:ext cx="6903720" cy="804672"/>
           </a:xfrm>
           <a:prstGeom prst="rect">
             <a:avLst>
@@ -31850,85 +31245,19 @@
             </a:avLst>
           </a:prstGeom>
           <a:solidFill>
-            <a:srgbClr val="E2E8F0"/>
+            <a:srgbClr val="F8FAFC"/>
           </a:solidFill>
           <a:ln w="12700">
             <a:solidFill>
               <a:srgbClr val="E2E8F0"/>
             </a:solidFill>
-            <a:prstDash val="solid"/>
-          </a:ln>
-        </p:spPr>
-      </p:sp>
-      <p:sp>
-        <p:nvSpPr>
-          <p:cNvPr id="35" name="Text 33"/>
-          <p:cNvSpPr/>
-          <p:nvPr/>
-        </p:nvSpPr>
-        <p:spPr>
-          <a:xfrm>
-            <a:off x="365760" y="4096512"/>
-            <a:ext cx="1371600" cy="804672"/>
-          </a:xfrm>
-          <a:prstGeom prst="rect">
-            <a:avLst/>
-          </a:prstGeom>
-          <a:noFill/>
-          <a:ln/>
-        </p:spPr>
-        <p:txBody>
-          <a:bodyPr wrap="square" lIns="0" tIns="0" rIns="0" bIns="0" rtlCol="0" anchor="ctr"/>
-          <a:lstStyle/>
-          <a:p>
-            <a:pPr algn="ctr" indent="0" marL="0">
-              <a:buNone/>
-            </a:pPr>
-            <a:r>
-              <a:rPr lang="en-US" sz="1100" b="1" dirty="0">
-                <a:solidFill>
-                  <a:srgbClr val="475569"/>
-                </a:solidFill>
-                <a:latin typeface="Trebuchet MS" pitchFamily="34" charset="0"/>
-                <a:ea typeface="Trebuchet MS" pitchFamily="34" charset="-122"/>
-                <a:cs typeface="Trebuchet MS" pitchFamily="34" charset="-120"/>
-              </a:rPr>
-              <a:t>Phonemes</a:t>
-            </a:r>
-            <a:endParaRPr lang="en-US" sz="1100" dirty="0"/>
-          </a:p>
-        </p:txBody>
-      </p:sp>
-      <p:sp>
-        <p:nvSpPr>
-          <p:cNvPr id="36" name="Shape 34"/>
-          <p:cNvSpPr/>
-          <p:nvPr/>
-        </p:nvSpPr>
-        <p:spPr>
-          <a:xfrm>
-            <a:off x="1874520" y="4096512"/>
-            <a:ext cx="6903720" cy="804672"/>
-          </a:xfrm>
-          <a:prstGeom prst="rect">
-            <a:avLst>
-              <a:gd name="adj" fmla="val 6818"/>
-            </a:avLst>
-          </a:prstGeom>
-          <a:solidFill>
-            <a:srgbClr val="F8FAFC"/>
-          </a:solidFill>
-          <a:ln w="12700">
-            <a:solidFill>
-              <a:srgbClr val="E2E8F0"/>
-            </a:solidFill>
             <a:prstDash val="dash"/>
           </a:ln>
         </p:spPr>
       </p:sp>
       <p:sp>
         <p:nvSpPr>
-          <p:cNvPr id="37" name="Text 35"/>
+          <p:cNvPr id="33" name="Text 31"/>
           <p:cNvSpPr/>
           <p:nvPr/>
         </p:nvSpPr>
@@ -32390,7 +31719,7 @@
                 <a:ea typeface="Trebuchet MS" pitchFamily="34" charset="-122"/>
                 <a:cs typeface="Trebuchet MS" pitchFamily="34" charset="-120"/>
               </a:rPr>
-              <a:t>hopper</a:t>
+              <a:t>hopscotch</a:t>
             </a:r>
             <a:endParaRPr lang="en-US" sz="2800" dirty="0"/>
           </a:p>
@@ -32470,7 +31799,7 @@
         </p:nvSpPr>
         <p:spPr>
           <a:xfrm>
-            <a:off x="2221992" y="2258568"/>
+            <a:off x="2938272" y="2258568"/>
             <a:ext cx="1828800" cy="292608"/>
           </a:xfrm>
           <a:prstGeom prst="rect">
@@ -32504,7 +31833,7 @@
         </p:nvSpPr>
         <p:spPr>
           <a:xfrm>
-            <a:off x="2221992" y="2258568"/>
+            <a:off x="2938272" y="2258568"/>
             <a:ext cx="1828800" cy="292608"/>
           </a:xfrm>
           <a:prstGeom prst="rect">
@@ -32543,7 +31872,7 @@
         </p:nvSpPr>
         <p:spPr>
           <a:xfrm>
-            <a:off x="2221992" y="2569464"/>
+            <a:off x="2938272" y="2569464"/>
             <a:ext cx="1828800" cy="201168"/>
           </a:xfrm>
           <a:prstGeom prst="rect">
@@ -32582,7 +31911,7 @@
         </p:nvSpPr>
         <p:spPr>
           <a:xfrm>
-            <a:off x="4370832" y="2258568"/>
+            <a:off x="5803392" y="2258568"/>
             <a:ext cx="1828800" cy="292608"/>
           </a:xfrm>
           <a:prstGeom prst="rect">
@@ -32616,7 +31945,7 @@
         </p:nvSpPr>
         <p:spPr>
           <a:xfrm>
-            <a:off x="4370832" y="2258568"/>
+            <a:off x="5803392" y="2258568"/>
             <a:ext cx="1828800" cy="292608"/>
           </a:xfrm>
           <a:prstGeom prst="rect">
@@ -32641,7 +31970,7 @@
                 <a:ea typeface="Trebuchet MS" pitchFamily="34" charset="-122"/>
                 <a:cs typeface="Trebuchet MS" pitchFamily="34" charset="-120"/>
               </a:rPr>
-              <a:t>p</a:t>
+              <a:t>scotch</a:t>
             </a:r>
             <a:endParaRPr lang="en-US" sz="1300" dirty="0"/>
           </a:p>
@@ -32655,7 +31984,7 @@
         </p:nvSpPr>
         <p:spPr>
           <a:xfrm>
-            <a:off x="4370832" y="2569464"/>
+            <a:off x="5803392" y="2569464"/>
             <a:ext cx="1828800" cy="201168"/>
           </a:xfrm>
           <a:prstGeom prst="rect">
@@ -32680,7 +32009,7 @@
                 <a:ea typeface="Calibri" pitchFamily="34" charset="-122"/>
                 <a:cs typeface="Calibri" pitchFamily="34" charset="-120"/>
               </a:rPr>
-              <a:t>doubled consonant</a:t>
+              <a:t>scoring scratch or mark</a:t>
             </a:r>
             <a:endParaRPr lang="en-US" sz="850" dirty="0"/>
           </a:p>
@@ -32688,14 +32017,701 @@
       </p:sp>
       <p:sp>
         <p:nvSpPr>
-          <p:cNvPr id="22" name="Text 20"/>
-          <p:cNvSpPr/>
-          <p:nvPr/>
-        </p:nvSpPr>
-        <p:spPr>
-          <a:xfrm>
-            <a:off x="4370832" y="2752344"/>
-            <a:ext cx="1828800" cy="182880"/>
+          <p:cNvPr id="22" name="Shape 20"/>
+          <p:cNvSpPr/>
+          <p:nvPr/>
+        </p:nvSpPr>
+        <p:spPr>
+          <a:xfrm>
+            <a:off x="365760" y="3273552"/>
+            <a:ext cx="1371600" cy="658368"/>
+          </a:xfrm>
+          <a:prstGeom prst="rect">
+            <a:avLst>
+              <a:gd name="adj" fmla="val 8333"/>
+            </a:avLst>
+          </a:prstGeom>
+          <a:solidFill>
+            <a:srgbClr val="E2E8F0"/>
+          </a:solidFill>
+          <a:ln w="12700">
+            <a:solidFill>
+              <a:srgbClr val="E2E8F0"/>
+            </a:solidFill>
+            <a:prstDash val="solid"/>
+          </a:ln>
+        </p:spPr>
+      </p:sp>
+      <p:sp>
+        <p:nvSpPr>
+          <p:cNvPr id="23" name="Text 21"/>
+          <p:cNvSpPr/>
+          <p:nvPr/>
+        </p:nvSpPr>
+        <p:spPr>
+          <a:xfrm>
+            <a:off x="365760" y="3273552"/>
+            <a:ext cx="1371600" cy="658368"/>
+          </a:xfrm>
+          <a:prstGeom prst="rect">
+            <a:avLst/>
+          </a:prstGeom>
+          <a:noFill/>
+          <a:ln/>
+        </p:spPr>
+        <p:txBody>
+          <a:bodyPr wrap="square" lIns="0" tIns="0" rIns="0" bIns="0" rtlCol="0" anchor="ctr"/>
+          <a:lstStyle/>
+          <a:p>
+            <a:pPr algn="ctr" indent="0" marL="0">
+              <a:buNone/>
+            </a:pPr>
+            <a:r>
+              <a:rPr lang="en-US" sz="1100" b="1" dirty="0">
+                <a:solidFill>
+                  <a:srgbClr val="475569"/>
+                </a:solidFill>
+                <a:latin typeface="Trebuchet MS" pitchFamily="34" charset="0"/>
+                <a:ea typeface="Trebuchet MS" pitchFamily="34" charset="-122"/>
+                <a:cs typeface="Trebuchet MS" pitchFamily="34" charset="-120"/>
+              </a:rPr>
+              <a:t>Syllables</a:t>
+            </a:r>
+            <a:endParaRPr lang="en-US" sz="1100" dirty="0"/>
+          </a:p>
+        </p:txBody>
+      </p:sp>
+      <p:sp>
+        <p:nvSpPr>
+          <p:cNvPr id="24" name="Shape 22"/>
+          <p:cNvSpPr/>
+          <p:nvPr/>
+        </p:nvSpPr>
+        <p:spPr>
+          <a:xfrm>
+            <a:off x="1874520" y="3273552"/>
+            <a:ext cx="6903720" cy="658368"/>
+          </a:xfrm>
+          <a:prstGeom prst="rect">
+            <a:avLst>
+              <a:gd name="adj" fmla="val 8333"/>
+            </a:avLst>
+          </a:prstGeom>
+          <a:solidFill>
+            <a:srgbClr val="CCFBF1"/>
+          </a:solidFill>
+          <a:ln w="12700">
+            <a:solidFill>
+              <a:srgbClr val="0D9488"/>
+            </a:solidFill>
+            <a:prstDash val="solid"/>
+          </a:ln>
+        </p:spPr>
+      </p:sp>
+      <p:sp>
+        <p:nvSpPr>
+          <p:cNvPr id="25" name="Shape 23"/>
+          <p:cNvSpPr/>
+          <p:nvPr/>
+        </p:nvSpPr>
+        <p:spPr>
+          <a:xfrm>
+            <a:off x="2999232" y="3364992"/>
+            <a:ext cx="1645920" cy="475488"/>
+          </a:xfrm>
+          <a:prstGeom prst="rect">
+            <a:avLst>
+              <a:gd name="adj" fmla="val 9615"/>
+            </a:avLst>
+          </a:prstGeom>
+          <a:solidFill>
+            <a:srgbClr val="FFFFFF"/>
+          </a:solidFill>
+          <a:ln w="12700">
+            <a:solidFill>
+              <a:srgbClr val="0D9488"/>
+            </a:solidFill>
+            <a:prstDash val="solid"/>
+          </a:ln>
+        </p:spPr>
+      </p:sp>
+      <p:sp>
+        <p:nvSpPr>
+          <p:cNvPr id="26" name="Text 24"/>
+          <p:cNvSpPr/>
+          <p:nvPr/>
+        </p:nvSpPr>
+        <p:spPr>
+          <a:xfrm>
+            <a:off x="2999232" y="3364992"/>
+            <a:ext cx="1645920" cy="475488"/>
+          </a:xfrm>
+          <a:prstGeom prst="rect">
+            <a:avLst/>
+          </a:prstGeom>
+          <a:noFill/>
+          <a:ln/>
+        </p:spPr>
+        <p:txBody>
+          <a:bodyPr wrap="square" lIns="0" tIns="0" rIns="0" bIns="0" rtlCol="0" anchor="ctr"/>
+          <a:lstStyle/>
+          <a:p>
+            <a:pPr algn="ctr" indent="0" marL="0">
+              <a:buNone/>
+            </a:pPr>
+            <a:r>
+              <a:rPr lang="en-US" sz="1400" b="1" dirty="0">
+                <a:solidFill>
+                  <a:srgbClr val="0D9488"/>
+                </a:solidFill>
+                <a:latin typeface="Trebuchet MS" pitchFamily="34" charset="0"/>
+                <a:ea typeface="Trebuchet MS" pitchFamily="34" charset="-122"/>
+                <a:cs typeface="Trebuchet MS" pitchFamily="34" charset="-120"/>
+              </a:rPr>
+              <a:t>hop</a:t>
+            </a:r>
+            <a:endParaRPr lang="en-US" sz="1400" dirty="0"/>
+          </a:p>
+        </p:txBody>
+      </p:sp>
+      <p:sp>
+        <p:nvSpPr>
+          <p:cNvPr id="27" name="Text 25"/>
+          <p:cNvSpPr/>
+          <p:nvPr/>
+        </p:nvSpPr>
+        <p:spPr>
+          <a:xfrm>
+            <a:off x="4645152" y="3364992"/>
+            <a:ext cx="1097280" cy="475488"/>
+          </a:xfrm>
+          <a:prstGeom prst="rect">
+            <a:avLst/>
+          </a:prstGeom>
+          <a:noFill/>
+          <a:ln/>
+        </p:spPr>
+        <p:txBody>
+          <a:bodyPr wrap="square" lIns="0" tIns="0" rIns="0" bIns="0" rtlCol="0" anchor="ctr"/>
+          <a:lstStyle/>
+          <a:p>
+            <a:pPr algn="ctr" indent="0" marL="0">
+              <a:buNone/>
+            </a:pPr>
+            <a:r>
+              <a:rPr lang="en-US" sz="1600" b="1" dirty="0">
+                <a:solidFill>
+                  <a:srgbClr val="0D9488"/>
+                </a:solidFill>
+                <a:latin typeface="Trebuchet MS" pitchFamily="34" charset="0"/>
+                <a:ea typeface="Trebuchet MS" pitchFamily="34" charset="-122"/>
+                <a:cs typeface="Trebuchet MS" pitchFamily="34" charset="-120"/>
+              </a:rPr>
+              <a:t>·</a:t>
+            </a:r>
+            <a:endParaRPr lang="en-US" sz="1600" dirty="0"/>
+          </a:p>
+        </p:txBody>
+      </p:sp>
+      <p:sp>
+        <p:nvSpPr>
+          <p:cNvPr id="28" name="Shape 26"/>
+          <p:cNvSpPr/>
+          <p:nvPr/>
+        </p:nvSpPr>
+        <p:spPr>
+          <a:xfrm>
+            <a:off x="5742432" y="3364992"/>
+            <a:ext cx="1645920" cy="475488"/>
+          </a:xfrm>
+          <a:prstGeom prst="rect">
+            <a:avLst>
+              <a:gd name="adj" fmla="val 9615"/>
+            </a:avLst>
+          </a:prstGeom>
+          <a:solidFill>
+            <a:srgbClr val="FFFFFF"/>
+          </a:solidFill>
+          <a:ln w="12700">
+            <a:solidFill>
+              <a:srgbClr val="0D9488"/>
+            </a:solidFill>
+            <a:prstDash val="solid"/>
+          </a:ln>
+        </p:spPr>
+      </p:sp>
+      <p:sp>
+        <p:nvSpPr>
+          <p:cNvPr id="29" name="Text 27"/>
+          <p:cNvSpPr/>
+          <p:nvPr/>
+        </p:nvSpPr>
+        <p:spPr>
+          <a:xfrm>
+            <a:off x="5742432" y="3364992"/>
+            <a:ext cx="1645920" cy="475488"/>
+          </a:xfrm>
+          <a:prstGeom prst="rect">
+            <a:avLst/>
+          </a:prstGeom>
+          <a:noFill/>
+          <a:ln/>
+        </p:spPr>
+        <p:txBody>
+          <a:bodyPr wrap="square" lIns="0" tIns="0" rIns="0" bIns="0" rtlCol="0" anchor="ctr"/>
+          <a:lstStyle/>
+          <a:p>
+            <a:pPr algn="ctr" indent="0" marL="0">
+              <a:buNone/>
+            </a:pPr>
+            <a:r>
+              <a:rPr lang="en-US" sz="1400" b="1" dirty="0">
+                <a:solidFill>
+                  <a:srgbClr val="0D9488"/>
+                </a:solidFill>
+                <a:latin typeface="Trebuchet MS" pitchFamily="34" charset="0"/>
+                <a:ea typeface="Trebuchet MS" pitchFamily="34" charset="-122"/>
+                <a:cs typeface="Trebuchet MS" pitchFamily="34" charset="-120"/>
+              </a:rPr>
+              <a:t>scotch</a:t>
+            </a:r>
+            <a:endParaRPr lang="en-US" sz="1400" dirty="0"/>
+          </a:p>
+        </p:txBody>
+      </p:sp>
+      <p:sp>
+        <p:nvSpPr>
+          <p:cNvPr id="30" name="Shape 28"/>
+          <p:cNvSpPr/>
+          <p:nvPr/>
+        </p:nvSpPr>
+        <p:spPr>
+          <a:xfrm>
+            <a:off x="365760" y="4096512"/>
+            <a:ext cx="1371600" cy="804672"/>
+          </a:xfrm>
+          <a:prstGeom prst="rect">
+            <a:avLst>
+              <a:gd name="adj" fmla="val 6818"/>
+            </a:avLst>
+          </a:prstGeom>
+          <a:solidFill>
+            <a:srgbClr val="E2E8F0"/>
+          </a:solidFill>
+          <a:ln w="12700">
+            <a:solidFill>
+              <a:srgbClr val="E2E8F0"/>
+            </a:solidFill>
+            <a:prstDash val="solid"/>
+          </a:ln>
+        </p:spPr>
+      </p:sp>
+      <p:sp>
+        <p:nvSpPr>
+          <p:cNvPr id="31" name="Text 29"/>
+          <p:cNvSpPr/>
+          <p:nvPr/>
+        </p:nvSpPr>
+        <p:spPr>
+          <a:xfrm>
+            <a:off x="365760" y="4096512"/>
+            <a:ext cx="1371600" cy="804672"/>
+          </a:xfrm>
+          <a:prstGeom prst="rect">
+            <a:avLst/>
+          </a:prstGeom>
+          <a:noFill/>
+          <a:ln/>
+        </p:spPr>
+        <p:txBody>
+          <a:bodyPr wrap="square" lIns="0" tIns="0" rIns="0" bIns="0" rtlCol="0" anchor="ctr"/>
+          <a:lstStyle/>
+          <a:p>
+            <a:pPr algn="ctr" indent="0" marL="0">
+              <a:buNone/>
+            </a:pPr>
+            <a:r>
+              <a:rPr lang="en-US" sz="1100" b="1" dirty="0">
+                <a:solidFill>
+                  <a:srgbClr val="475569"/>
+                </a:solidFill>
+                <a:latin typeface="Trebuchet MS" pitchFamily="34" charset="0"/>
+                <a:ea typeface="Trebuchet MS" pitchFamily="34" charset="-122"/>
+                <a:cs typeface="Trebuchet MS" pitchFamily="34" charset="-120"/>
+              </a:rPr>
+              <a:t>Phonemes</a:t>
+            </a:r>
+            <a:endParaRPr lang="en-US" sz="1100" dirty="0"/>
+          </a:p>
+        </p:txBody>
+      </p:sp>
+      <p:sp>
+        <p:nvSpPr>
+          <p:cNvPr id="32" name="Shape 30"/>
+          <p:cNvSpPr/>
+          <p:nvPr/>
+        </p:nvSpPr>
+        <p:spPr>
+          <a:xfrm>
+            <a:off x="1874520" y="4096512"/>
+            <a:ext cx="6903720" cy="804672"/>
+          </a:xfrm>
+          <a:prstGeom prst="rect">
+            <a:avLst>
+              <a:gd name="adj" fmla="val 6818"/>
+            </a:avLst>
+          </a:prstGeom>
+          <a:solidFill>
+            <a:srgbClr val="FCE7F3"/>
+          </a:solidFill>
+          <a:ln w="12700">
+            <a:solidFill>
+              <a:srgbClr val="DB2777"/>
+            </a:solidFill>
+            <a:prstDash val="solid"/>
+          </a:ln>
+        </p:spPr>
+      </p:sp>
+      <p:sp>
+        <p:nvSpPr>
+          <p:cNvPr id="33" name="Shape 31"/>
+          <p:cNvSpPr/>
+          <p:nvPr/>
+        </p:nvSpPr>
+        <p:spPr>
+          <a:xfrm>
+            <a:off x="2124837" y="4169664"/>
+            <a:ext cx="685800" cy="384048"/>
+          </a:xfrm>
+          <a:prstGeom prst="rect">
+            <a:avLst>
+              <a:gd name="adj" fmla="val 9524"/>
+            </a:avLst>
+          </a:prstGeom>
+          <a:solidFill>
+            <a:srgbClr val="FFFFFF"/>
+          </a:solidFill>
+          <a:ln w="12700">
+            <a:solidFill>
+              <a:srgbClr val="DB2777"/>
+            </a:solidFill>
+            <a:prstDash val="solid"/>
+          </a:ln>
+        </p:spPr>
+      </p:sp>
+      <p:sp>
+        <p:nvSpPr>
+          <p:cNvPr id="34" name="Text 32"/>
+          <p:cNvSpPr/>
+          <p:nvPr/>
+        </p:nvSpPr>
+        <p:spPr>
+          <a:xfrm>
+            <a:off x="2124837" y="4169664"/>
+            <a:ext cx="685800" cy="384048"/>
+          </a:xfrm>
+          <a:prstGeom prst="rect">
+            <a:avLst/>
+          </a:prstGeom>
+          <a:noFill/>
+          <a:ln/>
+        </p:spPr>
+        <p:txBody>
+          <a:bodyPr wrap="square" lIns="0" tIns="0" rIns="0" bIns="0" rtlCol="0" anchor="ctr"/>
+          <a:lstStyle/>
+          <a:p>
+            <a:pPr algn="ctr" indent="0" marL="0">
+              <a:buNone/>
+            </a:pPr>
+            <a:r>
+              <a:rPr lang="en-US" sz="900" b="1" dirty="0">
+                <a:solidFill>
+                  <a:srgbClr val="9D174D"/>
+                </a:solidFill>
+                <a:latin typeface="Trebuchet MS" pitchFamily="34" charset="0"/>
+                <a:ea typeface="Trebuchet MS" pitchFamily="34" charset="-122"/>
+                <a:cs typeface="Trebuchet MS" pitchFamily="34" charset="-120"/>
+              </a:rPr>
+              <a:t>h</a:t>
+            </a:r>
+            <a:endParaRPr lang="en-US" sz="900" dirty="0"/>
+          </a:p>
+        </p:txBody>
+      </p:sp>
+      <p:sp>
+        <p:nvSpPr>
+          <p:cNvPr id="35" name="Shape 33"/>
+          <p:cNvSpPr/>
+          <p:nvPr/>
+        </p:nvSpPr>
+        <p:spPr>
+          <a:xfrm>
+            <a:off x="3033522" y="4169664"/>
+            <a:ext cx="685800" cy="384048"/>
+          </a:xfrm>
+          <a:prstGeom prst="rect">
+            <a:avLst>
+              <a:gd name="adj" fmla="val 9524"/>
+            </a:avLst>
+          </a:prstGeom>
+          <a:solidFill>
+            <a:srgbClr val="FFFFFF"/>
+          </a:solidFill>
+          <a:ln w="12700">
+            <a:solidFill>
+              <a:srgbClr val="DB2777"/>
+            </a:solidFill>
+            <a:prstDash val="solid"/>
+          </a:ln>
+        </p:spPr>
+      </p:sp>
+      <p:sp>
+        <p:nvSpPr>
+          <p:cNvPr id="36" name="Text 34"/>
+          <p:cNvSpPr/>
+          <p:nvPr/>
+        </p:nvSpPr>
+        <p:spPr>
+          <a:xfrm>
+            <a:off x="3033522" y="4169664"/>
+            <a:ext cx="685800" cy="384048"/>
+          </a:xfrm>
+          <a:prstGeom prst="rect">
+            <a:avLst/>
+          </a:prstGeom>
+          <a:noFill/>
+          <a:ln/>
+        </p:spPr>
+        <p:txBody>
+          <a:bodyPr wrap="square" lIns="0" tIns="0" rIns="0" bIns="0" rtlCol="0" anchor="ctr"/>
+          <a:lstStyle/>
+          <a:p>
+            <a:pPr algn="ctr" indent="0" marL="0">
+              <a:buNone/>
+            </a:pPr>
+            <a:r>
+              <a:rPr lang="en-US" sz="900" b="1" dirty="0">
+                <a:solidFill>
+                  <a:srgbClr val="9D174D"/>
+                </a:solidFill>
+                <a:latin typeface="Trebuchet MS" pitchFamily="34" charset="0"/>
+                <a:ea typeface="Trebuchet MS" pitchFamily="34" charset="-122"/>
+                <a:cs typeface="Trebuchet MS" pitchFamily="34" charset="-120"/>
+              </a:rPr>
+              <a:t>o</a:t>
+            </a:r>
+            <a:endParaRPr lang="en-US" sz="900" dirty="0"/>
+          </a:p>
+        </p:txBody>
+      </p:sp>
+      <p:sp>
+        <p:nvSpPr>
+          <p:cNvPr id="37" name="Shape 35"/>
+          <p:cNvSpPr/>
+          <p:nvPr/>
+        </p:nvSpPr>
+        <p:spPr>
+          <a:xfrm>
+            <a:off x="3942207" y="4169664"/>
+            <a:ext cx="685800" cy="384048"/>
+          </a:xfrm>
+          <a:prstGeom prst="rect">
+            <a:avLst>
+              <a:gd name="adj" fmla="val 9524"/>
+            </a:avLst>
+          </a:prstGeom>
+          <a:solidFill>
+            <a:srgbClr val="FFFFFF"/>
+          </a:solidFill>
+          <a:ln w="12700">
+            <a:solidFill>
+              <a:srgbClr val="DB2777"/>
+            </a:solidFill>
+            <a:prstDash val="solid"/>
+          </a:ln>
+        </p:spPr>
+      </p:sp>
+      <p:sp>
+        <p:nvSpPr>
+          <p:cNvPr id="38" name="Text 36"/>
+          <p:cNvSpPr/>
+          <p:nvPr/>
+        </p:nvSpPr>
+        <p:spPr>
+          <a:xfrm>
+            <a:off x="3942207" y="4169664"/>
+            <a:ext cx="685800" cy="384048"/>
+          </a:xfrm>
+          <a:prstGeom prst="rect">
+            <a:avLst/>
+          </a:prstGeom>
+          <a:noFill/>
+          <a:ln/>
+        </p:spPr>
+        <p:txBody>
+          <a:bodyPr wrap="square" lIns="0" tIns="0" rIns="0" bIns="0" rtlCol="0" anchor="ctr"/>
+          <a:lstStyle/>
+          <a:p>
+            <a:pPr algn="ctr" indent="0" marL="0">
+              <a:buNone/>
+            </a:pPr>
+            <a:r>
+              <a:rPr lang="en-US" sz="900" b="1" dirty="0">
+                <a:solidFill>
+                  <a:srgbClr val="9D174D"/>
+                </a:solidFill>
+                <a:latin typeface="Trebuchet MS" pitchFamily="34" charset="0"/>
+                <a:ea typeface="Trebuchet MS" pitchFamily="34" charset="-122"/>
+                <a:cs typeface="Trebuchet MS" pitchFamily="34" charset="-120"/>
+              </a:rPr>
+              <a:t>p</a:t>
+            </a:r>
+            <a:endParaRPr lang="en-US" sz="900" dirty="0"/>
+          </a:p>
+        </p:txBody>
+      </p:sp>
+      <p:sp>
+        <p:nvSpPr>
+          <p:cNvPr id="39" name="Shape 37"/>
+          <p:cNvSpPr/>
+          <p:nvPr/>
+        </p:nvSpPr>
+        <p:spPr>
+          <a:xfrm>
+            <a:off x="4850892" y="4169664"/>
+            <a:ext cx="685800" cy="384048"/>
+          </a:xfrm>
+          <a:prstGeom prst="rect">
+            <a:avLst>
+              <a:gd name="adj" fmla="val 9524"/>
+            </a:avLst>
+          </a:prstGeom>
+          <a:solidFill>
+            <a:srgbClr val="FFFFFF"/>
+          </a:solidFill>
+          <a:ln w="12700">
+            <a:solidFill>
+              <a:srgbClr val="DB2777"/>
+            </a:solidFill>
+            <a:prstDash val="solid"/>
+          </a:ln>
+        </p:spPr>
+      </p:sp>
+      <p:sp>
+        <p:nvSpPr>
+          <p:cNvPr id="40" name="Text 38"/>
+          <p:cNvSpPr/>
+          <p:nvPr/>
+        </p:nvSpPr>
+        <p:spPr>
+          <a:xfrm>
+            <a:off x="4850892" y="4169664"/>
+            <a:ext cx="685800" cy="384048"/>
+          </a:xfrm>
+          <a:prstGeom prst="rect">
+            <a:avLst/>
+          </a:prstGeom>
+          <a:noFill/>
+          <a:ln/>
+        </p:spPr>
+        <p:txBody>
+          <a:bodyPr wrap="square" lIns="0" tIns="0" rIns="0" bIns="0" rtlCol="0" anchor="ctr"/>
+          <a:lstStyle/>
+          <a:p>
+            <a:pPr algn="ctr" indent="0" marL="0">
+              <a:buNone/>
+            </a:pPr>
+            <a:r>
+              <a:rPr lang="en-US" sz="900" b="1" dirty="0">
+                <a:solidFill>
+                  <a:srgbClr val="9D174D"/>
+                </a:solidFill>
+                <a:latin typeface="Trebuchet MS" pitchFamily="34" charset="0"/>
+                <a:ea typeface="Trebuchet MS" pitchFamily="34" charset="-122"/>
+                <a:cs typeface="Trebuchet MS" pitchFamily="34" charset="-120"/>
+              </a:rPr>
+              <a:t>s</a:t>
+            </a:r>
+            <a:endParaRPr lang="en-US" sz="900" dirty="0"/>
+          </a:p>
+        </p:txBody>
+      </p:sp>
+      <p:sp>
+        <p:nvSpPr>
+          <p:cNvPr id="41" name="Shape 39"/>
+          <p:cNvSpPr/>
+          <p:nvPr/>
+        </p:nvSpPr>
+        <p:spPr>
+          <a:xfrm>
+            <a:off x="5759577" y="4169664"/>
+            <a:ext cx="685800" cy="384048"/>
+          </a:xfrm>
+          <a:prstGeom prst="rect">
+            <a:avLst>
+              <a:gd name="adj" fmla="val 9524"/>
+            </a:avLst>
+          </a:prstGeom>
+          <a:solidFill>
+            <a:srgbClr val="FFFFFF"/>
+          </a:solidFill>
+          <a:ln w="12700">
+            <a:solidFill>
+              <a:srgbClr val="DB2777"/>
+            </a:solidFill>
+            <a:prstDash val="solid"/>
+          </a:ln>
+        </p:spPr>
+      </p:sp>
+      <p:sp>
+        <p:nvSpPr>
+          <p:cNvPr id="42" name="Text 40"/>
+          <p:cNvSpPr/>
+          <p:nvPr/>
+        </p:nvSpPr>
+        <p:spPr>
+          <a:xfrm>
+            <a:off x="5759577" y="4169664"/>
+            <a:ext cx="685800" cy="384048"/>
+          </a:xfrm>
+          <a:prstGeom prst="rect">
+            <a:avLst/>
+          </a:prstGeom>
+          <a:noFill/>
+          <a:ln/>
+        </p:spPr>
+        <p:txBody>
+          <a:bodyPr wrap="square" lIns="0" tIns="0" rIns="0" bIns="0" rtlCol="0" anchor="ctr"/>
+          <a:lstStyle/>
+          <a:p>
+            <a:pPr algn="ctr" indent="0" marL="0">
+              <a:buNone/>
+            </a:pPr>
+            <a:r>
+              <a:rPr lang="en-US" sz="900" b="1" dirty="0">
+                <a:solidFill>
+                  <a:srgbClr val="9D174D"/>
+                </a:solidFill>
+                <a:latin typeface="Trebuchet MS" pitchFamily="34" charset="0"/>
+                <a:ea typeface="Trebuchet MS" pitchFamily="34" charset="-122"/>
+                <a:cs typeface="Trebuchet MS" pitchFamily="34" charset="-120"/>
+              </a:rPr>
+              <a:t>c</a:t>
+            </a:r>
+            <a:endParaRPr lang="en-US" sz="900" dirty="0"/>
+          </a:p>
+        </p:txBody>
+      </p:sp>
+      <p:sp>
+        <p:nvSpPr>
+          <p:cNvPr id="43" name="Text 41"/>
+          <p:cNvSpPr/>
+          <p:nvPr/>
+        </p:nvSpPr>
+        <p:spPr>
+          <a:xfrm>
+            <a:off x="5759577" y="4572000"/>
+            <a:ext cx="685800" cy="219456"/>
           </a:xfrm>
           <a:prstGeom prst="rect">
             <a:avLst/>
@@ -32711,7 +32727,7 @@
               <a:buNone/>
             </a:pPr>
             <a:r>
-              <a:rPr lang="en-US" sz="700" i="1" dirty="0">
+              <a:rPr lang="en-US" sz="750" i="1" dirty="0">
                 <a:solidFill>
                   <a:srgbClr val="94A3B8"/>
                 </a:solidFill>
@@ -32719,56 +32735,49 @@
                 <a:ea typeface="Calibri" pitchFamily="34" charset="-122"/>
                 <a:cs typeface="Calibri" pitchFamily="34" charset="-120"/>
               </a:rPr>
-              <a:t>final consonant doubled before vowel suffix</a:t>
-            </a:r>
-            <a:endParaRPr lang="en-US" sz="700" dirty="0"/>
-          </a:p>
-        </p:txBody>
-      </p:sp>
-      <p:sp>
-        <p:nvSpPr>
-          <p:cNvPr id="23" name="Shape 21"/>
-          <p:cNvSpPr/>
-          <p:nvPr/>
-        </p:nvSpPr>
-        <p:spPr>
-          <a:xfrm>
-            <a:off x="6519672" y="2258568"/>
-            <a:ext cx="1828800" cy="292608"/>
+              <a:t>/k/</a:t>
+            </a:r>
+            <a:endParaRPr lang="en-US" sz="750" dirty="0"/>
+          </a:p>
+        </p:txBody>
+      </p:sp>
+      <p:sp>
+        <p:nvSpPr>
+          <p:cNvPr id="44" name="Shape 42"/>
+          <p:cNvSpPr/>
+          <p:nvPr/>
+        </p:nvSpPr>
+        <p:spPr>
+          <a:xfrm>
+            <a:off x="6668262" y="4169664"/>
+            <a:ext cx="685800" cy="384048"/>
           </a:xfrm>
           <a:prstGeom prst="rect">
             <a:avLst>
-              <a:gd name="adj" fmla="val 25000"/>
+              <a:gd name="adj" fmla="val 9524"/>
             </a:avLst>
           </a:prstGeom>
           <a:solidFill>
-            <a:srgbClr val="FCE7F3"/>
-          </a:solidFill>
-          <a:ln w="19050">
+            <a:srgbClr val="FFFFFF"/>
+          </a:solidFill>
+          <a:ln w="12700">
             <a:solidFill>
               <a:srgbClr val="DB2777"/>
             </a:solidFill>
             <a:prstDash val="solid"/>
           </a:ln>
-          <a:effectLst>
-            <a:outerShdw sx="100000" sy="100000" kx="0" ky="0" algn="bl" rotWithShape="0" blurRad="101600" dist="38100" dir="8100000">
-              <a:srgbClr val="000000">
-                <a:alpha val="12000"/>
-              </a:srgbClr>
-            </a:outerShdw>
-          </a:effectLst>
-        </p:spPr>
-      </p:sp>
-      <p:sp>
-        <p:nvSpPr>
-          <p:cNvPr id="24" name="Text 22"/>
-          <p:cNvSpPr/>
-          <p:nvPr/>
-        </p:nvSpPr>
-        <p:spPr>
-          <a:xfrm>
-            <a:off x="6519672" y="2258568"/>
-            <a:ext cx="1828800" cy="292608"/>
+        </p:spPr>
+      </p:sp>
+      <p:sp>
+        <p:nvSpPr>
+          <p:cNvPr id="45" name="Text 43"/>
+          <p:cNvSpPr/>
+          <p:nvPr/>
+        </p:nvSpPr>
+        <p:spPr>
+          <a:xfrm>
+            <a:off x="6668262" y="4169664"/>
+            <a:ext cx="685800" cy="384048"/>
           </a:xfrm>
           <a:prstGeom prst="rect">
             <a:avLst/>
@@ -32784,7 +32793,7 @@
               <a:buNone/>
             </a:pPr>
             <a:r>
-              <a:rPr lang="en-US" sz="1300" b="1" dirty="0">
+              <a:rPr lang="en-US" sz="900" b="1" dirty="0">
                 <a:solidFill>
                   <a:srgbClr val="9D174D"/>
                 </a:solidFill>
@@ -32792,22 +32801,88 @@
                 <a:ea typeface="Trebuchet MS" pitchFamily="34" charset="-122"/>
                 <a:cs typeface="Trebuchet MS" pitchFamily="34" charset="-120"/>
               </a:rPr>
-              <a:t>er</a:t>
-            </a:r>
-            <a:endParaRPr lang="en-US" sz="1300" dirty="0"/>
-          </a:p>
-        </p:txBody>
-      </p:sp>
-      <p:sp>
-        <p:nvSpPr>
-          <p:cNvPr id="25" name="Text 23"/>
-          <p:cNvSpPr/>
-          <p:nvPr/>
-        </p:nvSpPr>
-        <p:spPr>
-          <a:xfrm>
-            <a:off x="6519672" y="2569464"/>
-            <a:ext cx="1828800" cy="201168"/>
+              <a:t>o</a:t>
+            </a:r>
+            <a:endParaRPr lang="en-US" sz="900" dirty="0"/>
+          </a:p>
+        </p:txBody>
+      </p:sp>
+      <p:sp>
+        <p:nvSpPr>
+          <p:cNvPr id="46" name="Shape 44"/>
+          <p:cNvSpPr/>
+          <p:nvPr/>
+        </p:nvSpPr>
+        <p:spPr>
+          <a:xfrm>
+            <a:off x="7576947" y="4169664"/>
+            <a:ext cx="685800" cy="384048"/>
+          </a:xfrm>
+          <a:prstGeom prst="rect">
+            <a:avLst>
+              <a:gd name="adj" fmla="val 9524"/>
+            </a:avLst>
+          </a:prstGeom>
+          <a:solidFill>
+            <a:srgbClr val="FFFFFF"/>
+          </a:solidFill>
+          <a:ln w="12700">
+            <a:solidFill>
+              <a:srgbClr val="DB2777"/>
+            </a:solidFill>
+            <a:prstDash val="solid"/>
+          </a:ln>
+        </p:spPr>
+      </p:sp>
+      <p:sp>
+        <p:nvSpPr>
+          <p:cNvPr id="47" name="Text 45"/>
+          <p:cNvSpPr/>
+          <p:nvPr/>
+        </p:nvSpPr>
+        <p:spPr>
+          <a:xfrm>
+            <a:off x="7576947" y="4169664"/>
+            <a:ext cx="685800" cy="384048"/>
+          </a:xfrm>
+          <a:prstGeom prst="rect">
+            <a:avLst/>
+          </a:prstGeom>
+          <a:noFill/>
+          <a:ln/>
+        </p:spPr>
+        <p:txBody>
+          <a:bodyPr wrap="square" lIns="0" tIns="0" rIns="0" bIns="0" rtlCol="0" anchor="ctr"/>
+          <a:lstStyle/>
+          <a:p>
+            <a:pPr algn="ctr" indent="0" marL="0">
+              <a:buNone/>
+            </a:pPr>
+            <a:r>
+              <a:rPr lang="en-US" sz="900" b="1" dirty="0">
+                <a:solidFill>
+                  <a:srgbClr val="9D174D"/>
+                </a:solidFill>
+                <a:latin typeface="Trebuchet MS" pitchFamily="34" charset="0"/>
+                <a:ea typeface="Trebuchet MS" pitchFamily="34" charset="-122"/>
+                <a:cs typeface="Trebuchet MS" pitchFamily="34" charset="-120"/>
+              </a:rPr>
+              <a:t>tch</a:t>
+            </a:r>
+            <a:endParaRPr lang="en-US" sz="900" dirty="0"/>
+          </a:p>
+        </p:txBody>
+      </p:sp>
+      <p:sp>
+        <p:nvSpPr>
+          <p:cNvPr id="48" name="Text 46"/>
+          <p:cNvSpPr/>
+          <p:nvPr/>
+        </p:nvSpPr>
+        <p:spPr>
+          <a:xfrm>
+            <a:off x="7576947" y="4572000"/>
+            <a:ext cx="685800" cy="219456"/>
           </a:xfrm>
           <a:prstGeom prst="rect">
             <a:avLst/>
@@ -32823,638 +32898,17 @@
               <a:buNone/>
             </a:pPr>
             <a:r>
-              <a:rPr lang="en-US" sz="850" dirty="0">
-                <a:solidFill>
-                  <a:srgbClr val="475569"/>
+              <a:rPr lang="en-US" sz="750" i="1" dirty="0">
+                <a:solidFill>
+                  <a:srgbClr val="94A3B8"/>
                 </a:solidFill>
                 <a:latin typeface="Calibri" pitchFamily="34" charset="0"/>
                 <a:ea typeface="Calibri" pitchFamily="34" charset="-122"/>
                 <a:cs typeface="Calibri" pitchFamily="34" charset="-120"/>
               </a:rPr>
-              <a:t>one who does</a:t>
-            </a:r>
-            <a:endParaRPr lang="en-US" sz="850" dirty="0"/>
-          </a:p>
-        </p:txBody>
-      </p:sp>
-      <p:sp>
-        <p:nvSpPr>
-          <p:cNvPr id="26" name="Shape 24"/>
-          <p:cNvSpPr/>
-          <p:nvPr/>
-        </p:nvSpPr>
-        <p:spPr>
-          <a:xfrm>
-            <a:off x="365760" y="3273552"/>
-            <a:ext cx="1371600" cy="658368"/>
-          </a:xfrm>
-          <a:prstGeom prst="rect">
-            <a:avLst>
-              <a:gd name="adj" fmla="val 8333"/>
-            </a:avLst>
-          </a:prstGeom>
-          <a:solidFill>
-            <a:srgbClr val="E2E8F0"/>
-          </a:solidFill>
-          <a:ln w="12700">
-            <a:solidFill>
-              <a:srgbClr val="E2E8F0"/>
-            </a:solidFill>
-            <a:prstDash val="solid"/>
-          </a:ln>
-        </p:spPr>
-      </p:sp>
-      <p:sp>
-        <p:nvSpPr>
-          <p:cNvPr id="27" name="Text 25"/>
-          <p:cNvSpPr/>
-          <p:nvPr/>
-        </p:nvSpPr>
-        <p:spPr>
-          <a:xfrm>
-            <a:off x="365760" y="3273552"/>
-            <a:ext cx="1371600" cy="658368"/>
-          </a:xfrm>
-          <a:prstGeom prst="rect">
-            <a:avLst/>
-          </a:prstGeom>
-          <a:noFill/>
-          <a:ln/>
-        </p:spPr>
-        <p:txBody>
-          <a:bodyPr wrap="square" lIns="0" tIns="0" rIns="0" bIns="0" rtlCol="0" anchor="ctr"/>
-          <a:lstStyle/>
-          <a:p>
-            <a:pPr algn="ctr" indent="0" marL="0">
-              <a:buNone/>
-            </a:pPr>
-            <a:r>
-              <a:rPr lang="en-US" sz="1100" b="1" dirty="0">
-                <a:solidFill>
-                  <a:srgbClr val="475569"/>
-                </a:solidFill>
-                <a:latin typeface="Trebuchet MS" pitchFamily="34" charset="0"/>
-                <a:ea typeface="Trebuchet MS" pitchFamily="34" charset="-122"/>
-                <a:cs typeface="Trebuchet MS" pitchFamily="34" charset="-120"/>
-              </a:rPr>
-              <a:t>Syllables</a:t>
-            </a:r>
-            <a:endParaRPr lang="en-US" sz="1100" dirty="0"/>
-          </a:p>
-        </p:txBody>
-      </p:sp>
-      <p:sp>
-        <p:nvSpPr>
-          <p:cNvPr id="28" name="Shape 26"/>
-          <p:cNvSpPr/>
-          <p:nvPr/>
-        </p:nvSpPr>
-        <p:spPr>
-          <a:xfrm>
-            <a:off x="1874520" y="3273552"/>
-            <a:ext cx="6903720" cy="658368"/>
-          </a:xfrm>
-          <a:prstGeom prst="rect">
-            <a:avLst>
-              <a:gd name="adj" fmla="val 8333"/>
-            </a:avLst>
-          </a:prstGeom>
-          <a:solidFill>
-            <a:srgbClr val="CCFBF1"/>
-          </a:solidFill>
-          <a:ln w="12700">
-            <a:solidFill>
-              <a:srgbClr val="0D9488"/>
-            </a:solidFill>
-            <a:prstDash val="solid"/>
-          </a:ln>
-        </p:spPr>
-      </p:sp>
-      <p:sp>
-        <p:nvSpPr>
-          <p:cNvPr id="29" name="Shape 27"/>
-          <p:cNvSpPr/>
-          <p:nvPr/>
-        </p:nvSpPr>
-        <p:spPr>
-          <a:xfrm>
-            <a:off x="2999232" y="3364992"/>
-            <a:ext cx="1645920" cy="475488"/>
-          </a:xfrm>
-          <a:prstGeom prst="rect">
-            <a:avLst>
-              <a:gd name="adj" fmla="val 9615"/>
-            </a:avLst>
-          </a:prstGeom>
-          <a:solidFill>
-            <a:srgbClr val="FFFFFF"/>
-          </a:solidFill>
-          <a:ln w="12700">
-            <a:solidFill>
-              <a:srgbClr val="0D9488"/>
-            </a:solidFill>
-            <a:prstDash val="solid"/>
-          </a:ln>
-        </p:spPr>
-      </p:sp>
-      <p:sp>
-        <p:nvSpPr>
-          <p:cNvPr id="30" name="Text 28"/>
-          <p:cNvSpPr/>
-          <p:nvPr/>
-        </p:nvSpPr>
-        <p:spPr>
-          <a:xfrm>
-            <a:off x="2999232" y="3364992"/>
-            <a:ext cx="1645920" cy="475488"/>
-          </a:xfrm>
-          <a:prstGeom prst="rect">
-            <a:avLst/>
-          </a:prstGeom>
-          <a:noFill/>
-          <a:ln/>
-        </p:spPr>
-        <p:txBody>
-          <a:bodyPr wrap="square" lIns="0" tIns="0" rIns="0" bIns="0" rtlCol="0" anchor="ctr"/>
-          <a:lstStyle/>
-          <a:p>
-            <a:pPr algn="ctr" indent="0" marL="0">
-              <a:buNone/>
-            </a:pPr>
-            <a:r>
-              <a:rPr lang="en-US" sz="1400" b="1" dirty="0">
-                <a:solidFill>
-                  <a:srgbClr val="0D9488"/>
-                </a:solidFill>
-                <a:latin typeface="Trebuchet MS" pitchFamily="34" charset="0"/>
-                <a:ea typeface="Trebuchet MS" pitchFamily="34" charset="-122"/>
-                <a:cs typeface="Trebuchet MS" pitchFamily="34" charset="-120"/>
-              </a:rPr>
-              <a:t>hop</a:t>
-            </a:r>
-            <a:endParaRPr lang="en-US" sz="1400" dirty="0"/>
-          </a:p>
-        </p:txBody>
-      </p:sp>
-      <p:sp>
-        <p:nvSpPr>
-          <p:cNvPr id="31" name="Text 29"/>
-          <p:cNvSpPr/>
-          <p:nvPr/>
-        </p:nvSpPr>
-        <p:spPr>
-          <a:xfrm>
-            <a:off x="4645152" y="3364992"/>
-            <a:ext cx="1097280" cy="475488"/>
-          </a:xfrm>
-          <a:prstGeom prst="rect">
-            <a:avLst/>
-          </a:prstGeom>
-          <a:noFill/>
-          <a:ln/>
-        </p:spPr>
-        <p:txBody>
-          <a:bodyPr wrap="square" lIns="0" tIns="0" rIns="0" bIns="0" rtlCol="0" anchor="ctr"/>
-          <a:lstStyle/>
-          <a:p>
-            <a:pPr algn="ctr" indent="0" marL="0">
-              <a:buNone/>
-            </a:pPr>
-            <a:r>
-              <a:rPr lang="en-US" sz="1600" b="1" dirty="0">
-                <a:solidFill>
-                  <a:srgbClr val="0D9488"/>
-                </a:solidFill>
-                <a:latin typeface="Trebuchet MS" pitchFamily="34" charset="0"/>
-                <a:ea typeface="Trebuchet MS" pitchFamily="34" charset="-122"/>
-                <a:cs typeface="Trebuchet MS" pitchFamily="34" charset="-120"/>
-              </a:rPr>
-              <a:t>·</a:t>
-            </a:r>
-            <a:endParaRPr lang="en-US" sz="1600" dirty="0"/>
-          </a:p>
-        </p:txBody>
-      </p:sp>
-      <p:sp>
-        <p:nvSpPr>
-          <p:cNvPr id="32" name="Shape 30"/>
-          <p:cNvSpPr/>
-          <p:nvPr/>
-        </p:nvSpPr>
-        <p:spPr>
-          <a:xfrm>
-            <a:off x="5742432" y="3364992"/>
-            <a:ext cx="1645920" cy="475488"/>
-          </a:xfrm>
-          <a:prstGeom prst="rect">
-            <a:avLst>
-              <a:gd name="adj" fmla="val 9615"/>
-            </a:avLst>
-          </a:prstGeom>
-          <a:solidFill>
-            <a:srgbClr val="FFFFFF"/>
-          </a:solidFill>
-          <a:ln w="12700">
-            <a:solidFill>
-              <a:srgbClr val="0D9488"/>
-            </a:solidFill>
-            <a:prstDash val="solid"/>
-          </a:ln>
-        </p:spPr>
-      </p:sp>
-      <p:sp>
-        <p:nvSpPr>
-          <p:cNvPr id="33" name="Text 31"/>
-          <p:cNvSpPr/>
-          <p:nvPr/>
-        </p:nvSpPr>
-        <p:spPr>
-          <a:xfrm>
-            <a:off x="5742432" y="3364992"/>
-            <a:ext cx="1645920" cy="475488"/>
-          </a:xfrm>
-          <a:prstGeom prst="rect">
-            <a:avLst/>
-          </a:prstGeom>
-          <a:noFill/>
-          <a:ln/>
-        </p:spPr>
-        <p:txBody>
-          <a:bodyPr wrap="square" lIns="0" tIns="0" rIns="0" bIns="0" rtlCol="0" anchor="ctr"/>
-          <a:lstStyle/>
-          <a:p>
-            <a:pPr algn="ctr" indent="0" marL="0">
-              <a:buNone/>
-            </a:pPr>
-            <a:r>
-              <a:rPr lang="en-US" sz="1400" b="1" dirty="0">
-                <a:solidFill>
-                  <a:srgbClr val="0D9488"/>
-                </a:solidFill>
-                <a:latin typeface="Trebuchet MS" pitchFamily="34" charset="0"/>
-                <a:ea typeface="Trebuchet MS" pitchFamily="34" charset="-122"/>
-                <a:cs typeface="Trebuchet MS" pitchFamily="34" charset="-120"/>
-              </a:rPr>
-              <a:t>per</a:t>
-            </a:r>
-            <a:endParaRPr lang="en-US" sz="1400" dirty="0"/>
-          </a:p>
-        </p:txBody>
-      </p:sp>
-      <p:sp>
-        <p:nvSpPr>
-          <p:cNvPr id="34" name="Shape 32"/>
-          <p:cNvSpPr/>
-          <p:nvPr/>
-        </p:nvSpPr>
-        <p:spPr>
-          <a:xfrm>
-            <a:off x="365760" y="4096512"/>
-            <a:ext cx="1371600" cy="804672"/>
-          </a:xfrm>
-          <a:prstGeom prst="rect">
-            <a:avLst>
-              <a:gd name="adj" fmla="val 6818"/>
-            </a:avLst>
-          </a:prstGeom>
-          <a:solidFill>
-            <a:srgbClr val="E2E8F0"/>
-          </a:solidFill>
-          <a:ln w="12700">
-            <a:solidFill>
-              <a:srgbClr val="E2E8F0"/>
-            </a:solidFill>
-            <a:prstDash val="solid"/>
-          </a:ln>
-        </p:spPr>
-      </p:sp>
-      <p:sp>
-        <p:nvSpPr>
-          <p:cNvPr id="35" name="Text 33"/>
-          <p:cNvSpPr/>
-          <p:nvPr/>
-        </p:nvSpPr>
-        <p:spPr>
-          <a:xfrm>
-            <a:off x="365760" y="4096512"/>
-            <a:ext cx="1371600" cy="804672"/>
-          </a:xfrm>
-          <a:prstGeom prst="rect">
-            <a:avLst/>
-          </a:prstGeom>
-          <a:noFill/>
-          <a:ln/>
-        </p:spPr>
-        <p:txBody>
-          <a:bodyPr wrap="square" lIns="0" tIns="0" rIns="0" bIns="0" rtlCol="0" anchor="ctr"/>
-          <a:lstStyle/>
-          <a:p>
-            <a:pPr algn="ctr" indent="0" marL="0">
-              <a:buNone/>
-            </a:pPr>
-            <a:r>
-              <a:rPr lang="en-US" sz="1100" b="1" dirty="0">
-                <a:solidFill>
-                  <a:srgbClr val="475569"/>
-                </a:solidFill>
-                <a:latin typeface="Trebuchet MS" pitchFamily="34" charset="0"/>
-                <a:ea typeface="Trebuchet MS" pitchFamily="34" charset="-122"/>
-                <a:cs typeface="Trebuchet MS" pitchFamily="34" charset="-120"/>
-              </a:rPr>
-              <a:t>Phonemes</a:t>
-            </a:r>
-            <a:endParaRPr lang="en-US" sz="1100" dirty="0"/>
-          </a:p>
-        </p:txBody>
-      </p:sp>
-      <p:sp>
-        <p:nvSpPr>
-          <p:cNvPr id="36" name="Shape 34"/>
-          <p:cNvSpPr/>
-          <p:nvPr/>
-        </p:nvSpPr>
-        <p:spPr>
-          <a:xfrm>
-            <a:off x="1874520" y="4096512"/>
-            <a:ext cx="6903720" cy="658368"/>
-          </a:xfrm>
-          <a:prstGeom prst="rect">
-            <a:avLst>
-              <a:gd name="adj" fmla="val 8333"/>
-            </a:avLst>
-          </a:prstGeom>
-          <a:solidFill>
-            <a:srgbClr val="FCE7F3"/>
-          </a:solidFill>
-          <a:ln w="12700">
-            <a:solidFill>
-              <a:srgbClr val="DB2777"/>
-            </a:solidFill>
-            <a:prstDash val="solid"/>
-          </a:ln>
-        </p:spPr>
-      </p:sp>
-      <p:sp>
-        <p:nvSpPr>
-          <p:cNvPr id="37" name="Shape 35"/>
-          <p:cNvSpPr/>
-          <p:nvPr/>
-        </p:nvSpPr>
-        <p:spPr>
-          <a:xfrm>
-            <a:off x="2670048" y="4169664"/>
-            <a:ext cx="685800" cy="475488"/>
-          </a:xfrm>
-          <a:prstGeom prst="rect">
-            <a:avLst>
-              <a:gd name="adj" fmla="val 7692"/>
-            </a:avLst>
-          </a:prstGeom>
-          <a:solidFill>
-            <a:srgbClr val="FFFFFF"/>
-          </a:solidFill>
-          <a:ln w="12700">
-            <a:solidFill>
-              <a:srgbClr val="DB2777"/>
-            </a:solidFill>
-            <a:prstDash val="solid"/>
-          </a:ln>
-        </p:spPr>
-      </p:sp>
-      <p:sp>
-        <p:nvSpPr>
-          <p:cNvPr id="38" name="Text 36"/>
-          <p:cNvSpPr/>
-          <p:nvPr/>
-        </p:nvSpPr>
-        <p:spPr>
-          <a:xfrm>
-            <a:off x="2670048" y="4169664"/>
-            <a:ext cx="685800" cy="475488"/>
-          </a:xfrm>
-          <a:prstGeom prst="rect">
-            <a:avLst/>
-          </a:prstGeom>
-          <a:noFill/>
-          <a:ln/>
-        </p:spPr>
-        <p:txBody>
-          <a:bodyPr wrap="square" lIns="0" tIns="0" rIns="0" bIns="0" rtlCol="0" anchor="ctr"/>
-          <a:lstStyle/>
-          <a:p>
-            <a:pPr algn="ctr" indent="0" marL="0">
-              <a:buNone/>
-            </a:pPr>
-            <a:r>
-              <a:rPr lang="en-US" sz="900" b="1" dirty="0">
-                <a:solidFill>
-                  <a:srgbClr val="9D174D"/>
-                </a:solidFill>
-                <a:latin typeface="Trebuchet MS" pitchFamily="34" charset="0"/>
-                <a:ea typeface="Trebuchet MS" pitchFamily="34" charset="-122"/>
-                <a:cs typeface="Trebuchet MS" pitchFamily="34" charset="-120"/>
-              </a:rPr>
-              <a:t>h</a:t>
-            </a:r>
-            <a:endParaRPr lang="en-US" sz="900" dirty="0"/>
-          </a:p>
-        </p:txBody>
-      </p:sp>
-      <p:sp>
-        <p:nvSpPr>
-          <p:cNvPr id="39" name="Shape 37"/>
-          <p:cNvSpPr/>
-          <p:nvPr/>
-        </p:nvSpPr>
-        <p:spPr>
-          <a:xfrm>
-            <a:off x="4123944" y="4169664"/>
-            <a:ext cx="685800" cy="475488"/>
-          </a:xfrm>
-          <a:prstGeom prst="rect">
-            <a:avLst>
-              <a:gd name="adj" fmla="val 7692"/>
-            </a:avLst>
-          </a:prstGeom>
-          <a:solidFill>
-            <a:srgbClr val="FFFFFF"/>
-          </a:solidFill>
-          <a:ln w="12700">
-            <a:solidFill>
-              <a:srgbClr val="DB2777"/>
-            </a:solidFill>
-            <a:prstDash val="solid"/>
-          </a:ln>
-        </p:spPr>
-      </p:sp>
-      <p:sp>
-        <p:nvSpPr>
-          <p:cNvPr id="40" name="Text 38"/>
-          <p:cNvSpPr/>
-          <p:nvPr/>
-        </p:nvSpPr>
-        <p:spPr>
-          <a:xfrm>
-            <a:off x="4123944" y="4169664"/>
-            <a:ext cx="685800" cy="475488"/>
-          </a:xfrm>
-          <a:prstGeom prst="rect">
-            <a:avLst/>
-          </a:prstGeom>
-          <a:noFill/>
-          <a:ln/>
-        </p:spPr>
-        <p:txBody>
-          <a:bodyPr wrap="square" lIns="0" tIns="0" rIns="0" bIns="0" rtlCol="0" anchor="ctr"/>
-          <a:lstStyle/>
-          <a:p>
-            <a:pPr algn="ctr" indent="0" marL="0">
-              <a:buNone/>
-            </a:pPr>
-            <a:r>
-              <a:rPr lang="en-US" sz="900" b="1" dirty="0">
-                <a:solidFill>
-                  <a:srgbClr val="9D174D"/>
-                </a:solidFill>
-                <a:latin typeface="Trebuchet MS" pitchFamily="34" charset="0"/>
-                <a:ea typeface="Trebuchet MS" pitchFamily="34" charset="-122"/>
-                <a:cs typeface="Trebuchet MS" pitchFamily="34" charset="-120"/>
-              </a:rPr>
-              <a:t>o</a:t>
-            </a:r>
-            <a:endParaRPr lang="en-US" sz="900" dirty="0"/>
-          </a:p>
-        </p:txBody>
-      </p:sp>
-      <p:sp>
-        <p:nvSpPr>
-          <p:cNvPr id="41" name="Shape 39"/>
-          <p:cNvSpPr/>
-          <p:nvPr/>
-        </p:nvSpPr>
-        <p:spPr>
-          <a:xfrm>
-            <a:off x="5577840" y="4169664"/>
-            <a:ext cx="685800" cy="475488"/>
-          </a:xfrm>
-          <a:prstGeom prst="rect">
-            <a:avLst>
-              <a:gd name="adj" fmla="val 7692"/>
-            </a:avLst>
-          </a:prstGeom>
-          <a:solidFill>
-            <a:srgbClr val="FFFFFF"/>
-          </a:solidFill>
-          <a:ln w="12700">
-            <a:solidFill>
-              <a:srgbClr val="DB2777"/>
-            </a:solidFill>
-            <a:prstDash val="solid"/>
-          </a:ln>
-        </p:spPr>
-      </p:sp>
-      <p:sp>
-        <p:nvSpPr>
-          <p:cNvPr id="42" name="Text 40"/>
-          <p:cNvSpPr/>
-          <p:nvPr/>
-        </p:nvSpPr>
-        <p:spPr>
-          <a:xfrm>
-            <a:off x="5577840" y="4169664"/>
-            <a:ext cx="685800" cy="475488"/>
-          </a:xfrm>
-          <a:prstGeom prst="rect">
-            <a:avLst/>
-          </a:prstGeom>
-          <a:noFill/>
-          <a:ln/>
-        </p:spPr>
-        <p:txBody>
-          <a:bodyPr wrap="square" lIns="0" tIns="0" rIns="0" bIns="0" rtlCol="0" anchor="ctr"/>
-          <a:lstStyle/>
-          <a:p>
-            <a:pPr algn="ctr" indent="0" marL="0">
-              <a:buNone/>
-            </a:pPr>
-            <a:r>
-              <a:rPr lang="en-US" sz="900" b="1" dirty="0">
-                <a:solidFill>
-                  <a:srgbClr val="9D174D"/>
-                </a:solidFill>
-                <a:latin typeface="Trebuchet MS" pitchFamily="34" charset="0"/>
-                <a:ea typeface="Trebuchet MS" pitchFamily="34" charset="-122"/>
-                <a:cs typeface="Trebuchet MS" pitchFamily="34" charset="-120"/>
-              </a:rPr>
-              <a:t>pp</a:t>
-            </a:r>
-            <a:endParaRPr lang="en-US" sz="900" dirty="0"/>
-          </a:p>
-        </p:txBody>
-      </p:sp>
-      <p:sp>
-        <p:nvSpPr>
-          <p:cNvPr id="43" name="Shape 41"/>
-          <p:cNvSpPr/>
-          <p:nvPr/>
-        </p:nvSpPr>
-        <p:spPr>
-          <a:xfrm>
-            <a:off x="7031736" y="4169664"/>
-            <a:ext cx="685800" cy="475488"/>
-          </a:xfrm>
-          <a:prstGeom prst="rect">
-            <a:avLst>
-              <a:gd name="adj" fmla="val 7692"/>
-            </a:avLst>
-          </a:prstGeom>
-          <a:solidFill>
-            <a:srgbClr val="FFFFFF"/>
-          </a:solidFill>
-          <a:ln w="12700">
-            <a:solidFill>
-              <a:srgbClr val="DB2777"/>
-            </a:solidFill>
-            <a:prstDash val="solid"/>
-          </a:ln>
-        </p:spPr>
-      </p:sp>
-      <p:sp>
-        <p:nvSpPr>
-          <p:cNvPr id="44" name="Text 42"/>
-          <p:cNvSpPr/>
-          <p:nvPr/>
-        </p:nvSpPr>
-        <p:spPr>
-          <a:xfrm>
-            <a:off x="7031736" y="4169664"/>
-            <a:ext cx="685800" cy="475488"/>
-          </a:xfrm>
-          <a:prstGeom prst="rect">
-            <a:avLst/>
-          </a:prstGeom>
-          <a:noFill/>
-          <a:ln/>
-        </p:spPr>
-        <p:txBody>
-          <a:bodyPr wrap="square" lIns="0" tIns="0" rIns="0" bIns="0" rtlCol="0" anchor="ctr"/>
-          <a:lstStyle/>
-          <a:p>
-            <a:pPr algn="ctr" indent="0" marL="0">
-              <a:buNone/>
-            </a:pPr>
-            <a:r>
-              <a:rPr lang="en-US" sz="900" b="1" dirty="0">
-                <a:solidFill>
-                  <a:srgbClr val="9D174D"/>
-                </a:solidFill>
-                <a:latin typeface="Trebuchet MS" pitchFamily="34" charset="0"/>
-                <a:ea typeface="Trebuchet MS" pitchFamily="34" charset="-122"/>
-                <a:cs typeface="Trebuchet MS" pitchFamily="34" charset="-120"/>
-              </a:rPr>
-              <a:t>er</a:t>
-            </a:r>
-            <a:endParaRPr lang="en-US" sz="900" dirty="0"/>
+              <a:t>/ch/</a:t>
+            </a:r>
+            <a:endParaRPr lang="en-US" sz="750" dirty="0"/>
           </a:p>
         </p:txBody>
       </p:sp>
@@ -35406,7 +34860,7 @@
                 <a:ea typeface="Trebuchet MS" pitchFamily="34" charset="-122"/>
                 <a:cs typeface="Trebuchet MS" pitchFamily="34" charset="-120"/>
               </a:rPr>
-              <a:t>non-</a:t>
+              <a:t>out-</a:t>
             </a:r>
             <a:endParaRPr lang="en-US" sz="1300" dirty="0"/>
           </a:p>
@@ -35712,7 +35166,7 @@
                 <a:ea typeface="Trebuchet MS" pitchFamily="34" charset="-122"/>
                 <a:cs typeface="Trebuchet MS" pitchFamily="34" charset="-120"/>
               </a:rPr>
-              <a:t>out-</a:t>
+              <a:t>non-</a:t>
             </a:r>
             <a:endParaRPr lang="en-US" sz="1300" dirty="0"/>
           </a:p>
@@ -35801,7 +35255,7 @@
                 <a:ea typeface="Trebuchet MS" pitchFamily="34" charset="-122"/>
                 <a:cs typeface="Trebuchet MS" pitchFamily="34" charset="-120"/>
               </a:rPr>
-              <a:t>-s</a:t>
+              <a:t>-pers</a:t>
             </a:r>
             <a:endParaRPr lang="en-US" sz="1300" dirty="0"/>
           </a:p>
@@ -35865,7 +35319,7 @@
                 <a:ea typeface="Trebuchet MS" pitchFamily="34" charset="-122"/>
                 <a:cs typeface="Trebuchet MS" pitchFamily="34" charset="-120"/>
               </a:rPr>
-              <a:t>up-</a:t>
+              <a:t>un-</a:t>
             </a:r>
             <a:endParaRPr lang="en-US" sz="1300" dirty="0"/>
           </a:p>
@@ -35954,7 +35408,7 @@
                 <a:ea typeface="Trebuchet MS" pitchFamily="34" charset="-122"/>
                 <a:cs typeface="Trebuchet MS" pitchFamily="34" charset="-120"/>
               </a:rPr>
-              <a:t>-py</a:t>
+              <a:t>-scotch</a:t>
             </a:r>
             <a:endParaRPr lang="en-US" sz="1300" dirty="0"/>
           </a:p>
@@ -36389,7 +35843,7 @@
                 <a:ea typeface="Trebuchet MS" pitchFamily="34" charset="-122"/>
                 <a:cs typeface="Trebuchet MS" pitchFamily="34" charset="-120"/>
               </a:rPr>
-              <a:t>rehop</a:t>
+              <a:t>outhop</a:t>
             </a:r>
             <a:endParaRPr lang="en-US" sz="1200" dirty="0"/>
           </a:p>
@@ -36455,7 +35909,7 @@
                 <a:ea typeface="Trebuchet MS" pitchFamily="34" charset="-122"/>
                 <a:cs typeface="Trebuchet MS" pitchFamily="34" charset="-120"/>
               </a:rPr>
-              <a:t>hops</a:t>
+              <a:t>grasshopper</a:t>
             </a:r>
             <a:endParaRPr lang="en-US" sz="1200" dirty="0"/>
           </a:p>
@@ -36521,7 +35975,7 @@
                 <a:ea typeface="Trebuchet MS" pitchFamily="34" charset="-122"/>
                 <a:cs typeface="Trebuchet MS" pitchFamily="34" charset="-120"/>
               </a:rPr>
-              <a:t>hoppy</a:t>
+              <a:t>rehop</a:t>
             </a:r>
             <a:endParaRPr lang="en-US" sz="1200" dirty="0"/>
           </a:p>
@@ -37709,7 +37163,7 @@
                 <a:ea typeface="Calibri" pitchFamily="34" charset="-122"/>
                 <a:cs typeface="Calibri" pitchFamily="34" charset="-120"/>
               </a:rPr>
-              <a:t>1.  The word 'hopping' is made by adding the suffix '-ing' to the root 'hop'.</a:t>
+              <a:t>1.  The word 'hopping' is made by adding '-ing' to the root 'hop'.</a:t>
             </a:r>
             <a:endParaRPr lang="en-US" sz="1300" dirty="0"/>
           </a:p>
@@ -37848,7 +37302,7 @@
                 <a:ea typeface="Calibri" pitchFamily="34" charset="-122"/>
                 <a:cs typeface="Calibri" pitchFamily="34" charset="-120"/>
               </a:rPr>
-              <a:t>2.  The root 'hop' comes from ancient Latin.</a:t>
+              <a:t>2.  A grasshopper gets part of its name from the root 'hop' because it hops.</a:t>
             </a:r>
             <a:endParaRPr lang="en-US" sz="1300" dirty="0"/>
           </a:p>
@@ -37871,11 +37325,11 @@
             </a:avLst>
           </a:prstGeom>
           <a:solidFill>
-            <a:srgbClr val="FEE2E2"/>
-          </a:solidFill>
-          <a:ln w="12700">
-            <a:solidFill>
-              <a:srgbClr val="DC2626"/>
+            <a:srgbClr val="DCFCE7"/>
+          </a:solidFill>
+          <a:ln w="12700">
+            <a:solidFill>
+              <a:srgbClr val="16A34A"/>
             </a:solidFill>
             <a:prstDash val="solid"/>
           </a:ln>
@@ -37908,13 +37362,13 @@
             <a:r>
               <a:rPr lang="en-US" sz="1100" b="1" dirty="0">
                 <a:solidFill>
-                  <a:srgbClr val="DC2626"/>
+                  <a:srgbClr val="16A34A"/>
                 </a:solidFill>
                 <a:latin typeface="Trebuchet MS" pitchFamily="34" charset="0"/>
                 <a:ea typeface="Trebuchet MS" pitchFamily="34" charset="-122"/>
                 <a:cs typeface="Trebuchet MS" pitchFamily="34" charset="-120"/>
               </a:rPr>
-              <a:t>FALSE</a:t>
+              <a:t>TRUE</a:t>
             </a:r>
             <a:endParaRPr lang="en-US" sz="1100" dirty="0"/>
           </a:p>
@@ -37987,7 +37441,7 @@
                 <a:ea typeface="Calibri" pitchFamily="34" charset="-122"/>
                 <a:cs typeface="Calibri" pitchFamily="34" charset="-120"/>
               </a:rPr>
-              <a:t>3.  A grasshopper is called that because it hops through the grass.</a:t>
+              <a:t>3.  The root 'hop' comes from ancient Greek.</a:t>
             </a:r>
             <a:endParaRPr lang="en-US" sz="1300" dirty="0"/>
           </a:p>
@@ -38010,11 +37464,11 @@
             </a:avLst>
           </a:prstGeom>
           <a:solidFill>
-            <a:srgbClr val="DCFCE7"/>
-          </a:solidFill>
-          <a:ln w="12700">
-            <a:solidFill>
-              <a:srgbClr val="16A34A"/>
+            <a:srgbClr val="FEE2E2"/>
+          </a:solidFill>
+          <a:ln w="12700">
+            <a:solidFill>
+              <a:srgbClr val="DC2626"/>
             </a:solidFill>
             <a:prstDash val="solid"/>
           </a:ln>
@@ -38047,13 +37501,13 @@
             <a:r>
               <a:rPr lang="en-US" sz="1100" b="1" dirty="0">
                 <a:solidFill>
-                  <a:srgbClr val="16A34A"/>
+                  <a:srgbClr val="DC2626"/>
                 </a:solidFill>
                 <a:latin typeface="Trebuchet MS" pitchFamily="34" charset="0"/>
                 <a:ea typeface="Trebuchet MS" pitchFamily="34" charset="-122"/>
                 <a:cs typeface="Trebuchet MS" pitchFamily="34" charset="-120"/>
               </a:rPr>
-              <a:t>TRUE</a:t>
+              <a:t>FALSE</a:t>
             </a:r>
             <a:endParaRPr lang="en-US" sz="1100" dirty="0"/>
           </a:p>
@@ -38126,7 +37580,7 @@
                 <a:ea typeface="Calibri" pitchFamily="34" charset="-122"/>
                 <a:cs typeface="Calibri" pitchFamily="34" charset="-120"/>
               </a:rPr>
-              <a:t>4.  The word 'hopped' tells us that hopping happened in the past.</a:t>
+              <a:t>4.  'Hopscotch' contains the root 'hop' meaning a short jump.</a:t>
             </a:r>
             <a:endParaRPr lang="en-US" sz="1300" dirty="0"/>
           </a:p>
@@ -38265,7 +37719,7 @@
                 <a:ea typeface="Calibri" pitchFamily="34" charset="-122"/>
                 <a:cs typeface="Calibri" pitchFamily="34" charset="-120"/>
               </a:rPr>
-              <a:t>5.  The word 'hopscotch' has nothing to do with hopping.</a:t>
+              <a:t>5.  The root 'hop' means to swim through water.</a:t>
             </a:r>
             <a:endParaRPr lang="en-US" sz="1300" dirty="0"/>
           </a:p>
@@ -39234,7 +38688,7 @@
                 <a:ea typeface="Trebuchet MS" pitchFamily="34" charset="-122"/>
                 <a:cs typeface="Trebuchet MS" pitchFamily="34" charset="-120"/>
               </a:rPr>
-              <a:t>rehop</a:t>
+              <a:t>outhop</a:t>
             </a:r>
             <a:endParaRPr lang="en-US" sz="1300" dirty="0"/>
           </a:p>
@@ -39300,7 +38754,7 @@
                 <a:ea typeface="Trebuchet MS" pitchFamily="34" charset="-122"/>
                 <a:cs typeface="Trebuchet MS" pitchFamily="34" charset="-120"/>
               </a:rPr>
-              <a:t>hops</a:t>
+              <a:t>grasshopper</a:t>
             </a:r>
             <a:endParaRPr lang="en-US" sz="1300" dirty="0"/>
           </a:p>
@@ -40085,7 +39539,7 @@
                 <a:ea typeface="Trebuchet MS" pitchFamily="34" charset="-122"/>
                 <a:cs typeface="Trebuchet MS" pitchFamily="34" charset="-120"/>
               </a:rPr>
-              <a:t>non-</a:t>
+              <a:t>out-</a:t>
             </a:r>
             <a:endParaRPr lang="en-US" sz="1300" dirty="0"/>
           </a:p>
@@ -40391,7 +39845,7 @@
                 <a:ea typeface="Trebuchet MS" pitchFamily="34" charset="-122"/>
                 <a:cs typeface="Trebuchet MS" pitchFamily="34" charset="-120"/>
               </a:rPr>
-              <a:t>out-</a:t>
+              <a:t>non-</a:t>
             </a:r>
             <a:endParaRPr lang="en-US" sz="1300" dirty="0"/>
           </a:p>
@@ -40480,7 +39934,7 @@
                 <a:ea typeface="Trebuchet MS" pitchFamily="34" charset="-122"/>
                 <a:cs typeface="Trebuchet MS" pitchFamily="34" charset="-120"/>
               </a:rPr>
-              <a:t>-s</a:t>
+              <a:t>-pers</a:t>
             </a:r>
             <a:endParaRPr lang="en-US" sz="1300" dirty="0"/>
           </a:p>
@@ -40544,7 +39998,7 @@
                 <a:ea typeface="Trebuchet MS" pitchFamily="34" charset="-122"/>
                 <a:cs typeface="Trebuchet MS" pitchFamily="34" charset="-120"/>
               </a:rPr>
-              <a:t>up-</a:t>
+              <a:t>un-</a:t>
             </a:r>
             <a:endParaRPr lang="en-US" sz="1300" dirty="0"/>
           </a:p>
@@ -40633,7 +40087,7 @@
                 <a:ea typeface="Trebuchet MS" pitchFamily="34" charset="-122"/>
                 <a:cs typeface="Trebuchet MS" pitchFamily="34" charset="-120"/>
               </a:rPr>
-              <a:t>-py</a:t>
+              <a:t>-scotch</a:t>
             </a:r>
             <a:endParaRPr lang="en-US" sz="1300" dirty="0"/>
           </a:p>
@@ -41544,7 +40998,7 @@
                 <a:ea typeface="Calibri" pitchFamily="34" charset="-122"/>
                 <a:cs typeface="Calibri" pitchFamily="34" charset="-120"/>
               </a:rPr>
-              <a:t>To jump or hop too far over something.</a:t>
+              <a:t>To jump too far or hop over something by going past it.</a:t>
             </a:r>
             <a:endParaRPr lang="en-US" sz="1200" dirty="0"/>
           </a:p>
@@ -41683,7 +41137,7 @@
                 <a:ea typeface="Calibri" pitchFamily="34" charset="-122"/>
                 <a:cs typeface="Calibri" pitchFamily="34" charset="-120"/>
               </a:rPr>
-              <a:t>Something or someone that hops, like a grasshopper.</a:t>
+              <a:t>Something or someone that hops, or a container things fall through.</a:t>
             </a:r>
             <a:endParaRPr lang="en-US" sz="1200" dirty="0"/>
           </a:p>
@@ -41822,7 +41276,7 @@
                 <a:ea typeface="Calibri" pitchFamily="34" charset="-122"/>
                 <a:cs typeface="Calibri" pitchFamily="34" charset="-120"/>
               </a:rPr>
-              <a:t>To hop again or repeat a hopping movement.</a:t>
+              <a:t>To hop further or better than someone else.</a:t>
             </a:r>
             <a:endParaRPr lang="en-US" sz="1200" dirty="0"/>
           </a:p>
@@ -42100,7 +41554,7 @@
                 <a:ea typeface="Calibri" pitchFamily="34" charset="-122"/>
                 <a:cs typeface="Calibri" pitchFamily="34" charset="-120"/>
               </a:rPr>
-              <a:t>Moving by jumping quickly from place to place, like a kangaroo or rabbit.</a:t>
+              <a:t>Jumping on one foot or moving in short jumps, happening right now.</a:t>
             </a:r>
             <a:endParaRPr lang="en-US" sz="1200" dirty="0"/>
           </a:p>
@@ -42173,7 +41627,7 @@
                 <a:ea typeface="Trebuchet MS" pitchFamily="34" charset="-122"/>
                 <a:cs typeface="Trebuchet MS" pitchFamily="34" charset="-120"/>
               </a:rPr>
-              <a:t>rehop</a:t>
+              <a:t>outhop</a:t>
             </a:r>
             <a:endParaRPr lang="en-US" sz="1200" dirty="0"/>
           </a:p>
@@ -42239,7 +41693,7 @@
                 <a:ea typeface="Calibri" pitchFamily="34" charset="-122"/>
                 <a:cs typeface="Calibri" pitchFamily="34" charset="-120"/>
               </a:rPr>
-              <a:t>More than one hop, or the action of hopping several times.</a:t>
+              <a:t>A jumping insect with long back legs that hops and makes chirping sounds.</a:t>
             </a:r>
             <a:endParaRPr lang="en-US" sz="1200" dirty="0"/>
           </a:p>
@@ -42312,7 +41766,7 @@
                 <a:ea typeface="Trebuchet MS" pitchFamily="34" charset="-122"/>
                 <a:cs typeface="Trebuchet MS" pitchFamily="34" charset="-120"/>
               </a:rPr>
-              <a:t>hops</a:t>
+              <a:t>grasshopper</a:t>
             </a:r>
             <a:endParaRPr lang="en-US" sz="1200" dirty="0"/>
           </a:p>
@@ -42378,7 +41832,7 @@
                 <a:ea typeface="Calibri" pitchFamily="34" charset="-122"/>
                 <a:cs typeface="Calibri" pitchFamily="34" charset="-120"/>
               </a:rPr>
-              <a:t>Did a hop or series of hops in the past.</a:t>
+              <a:t>Already jumped on one foot or made short jumps in the past.</a:t>
             </a:r>
             <a:endParaRPr lang="en-US" sz="1200" dirty="0"/>
           </a:p>
@@ -42873,7 +42327,7 @@
                 <a:ea typeface="Calibri" pitchFamily="34" charset="-122"/>
                 <a:cs typeface="Calibri" pitchFamily="34" charset="-120"/>
               </a:rPr>
-              <a:t>The little frog was hopping across the wet stones beside the creek.</a:t>
+              <a:t>The kangaroo was hopping across the dusty outback road when we spotted it from the car.</a:t>
             </a:r>
             <a:endParaRPr lang="en-US" sz="1500" dirty="0"/>
           </a:p>
@@ -43037,7 +42491,7 @@
                 <a:ea typeface="Calibri" pitchFamily="34" charset="-122"/>
                 <a:cs typeface="Calibri" pitchFamily="34" charset="-120"/>
               </a:rPr>
-              <a:t>We played hopscotch in the playground during lunch, taking turns to throw the stone.</a:t>
+              <a:t>We played hopscotch on the footpath outside school during our lunch break.</a:t>
             </a:r>
             <a:endParaRPr lang="en-US" sz="1500" dirty="0"/>
           </a:p>
@@ -43201,7 +42655,7 @@
                 <a:ea typeface="Calibri" pitchFamily="34" charset="-122"/>
                 <a:cs typeface="Calibri" pitchFamily="34" charset="-120"/>
               </a:rPr>
-              <a:t>The kangaroo hopped over the fence and disappeared into the bush.</a:t>
+              <a:t>The grasshopper leapt from one blade of grass to another in the warm afternoon sun.</a:t>
             </a:r>
             <a:endParaRPr lang="en-US" sz="1500" dirty="0"/>
           </a:p>
